--- a/documents/Introduction.pptx
+++ b/documents/Introduction.pptx
@@ -119,7 +119,41 @@
       </a:defRPr>
     </a:lvl9pPr>
   </p:defaultTextStyle>
+  <p:extLst>
+    <p:ext uri="{EFAFB233-063F-42B5-8137-9DF3F51BA10A}">
+      <p15:sldGuideLst xmlns:p15="http://schemas.microsoft.com/office/powerpoint/2012/main"/>
+    </p:ext>
+  </p:extLst>
 </p:presentation>
+</file>
+
+<file path=ppt/changesInfos/changesInfo1.xml><?xml version="1.0" encoding="utf-8"?>
+<pc:chgInfo xmlns:a="http://schemas.openxmlformats.org/drawingml/2006/main" xmlns:r="http://schemas.openxmlformats.org/officeDocument/2006/relationships" xmlns:ac="http://schemas.microsoft.com/office/drawing/2013/main/command" xmlns:pc="http://schemas.microsoft.com/office/powerpoint/2013/main/command">
+  <pc:docChgLst>
+    <pc:chgData name="Vaughn Staples" userId="9a5933822faaa4bf" providerId="LiveId" clId="{BB914C8C-BCA1-484B-9A1F-EBF33ADB071F}"/>
+    <pc:docChg chg="modSld">
+      <pc:chgData name="Vaughn Staples" userId="9a5933822faaa4bf" providerId="LiveId" clId="{BB914C8C-BCA1-484B-9A1F-EBF33ADB071F}" dt="2026-04-04T03:16:28.775" v="0" actId="22"/>
+      <pc:docMkLst>
+        <pc:docMk/>
+      </pc:docMkLst>
+      <pc:sldChg chg="addSp mod">
+        <pc:chgData name="Vaughn Staples" userId="9a5933822faaa4bf" providerId="LiveId" clId="{BB914C8C-BCA1-484B-9A1F-EBF33ADB071F}" dt="2026-04-04T03:16:28.775" v="0" actId="22"/>
+        <pc:sldMkLst>
+          <pc:docMk/>
+          <pc:sldMk cId="2878559713" sldId="264"/>
+        </pc:sldMkLst>
+        <pc:picChg chg="add">
+          <ac:chgData name="Vaughn Staples" userId="9a5933822faaa4bf" providerId="LiveId" clId="{BB914C8C-BCA1-484B-9A1F-EBF33ADB071F}" dt="2026-04-04T03:16:28.775" v="0" actId="22"/>
+          <ac:picMkLst>
+            <pc:docMk/>
+            <pc:sldMk cId="2878559713" sldId="264"/>
+            <ac:picMk id="3" creationId="{3EFE962B-7112-2AEB-9DF7-54A235D3B9A2}"/>
+          </ac:picMkLst>
+        </pc:picChg>
+      </pc:sldChg>
+    </pc:docChg>
+  </pc:docChgLst>
+</pc:chgInfo>
 </file>
 
 <file path=ppt/slideLayouts/slideLayout1.xml><?xml version="1.0" encoding="utf-8"?>
@@ -269,7 +303,7 @@
           <a:p>
             <a:fld id="{39DFAE05-33A5-42B2-8B0E-BC60315FEFBC}" type="datetimeFigureOut">
               <a:rPr lang="en-US" smtClean="0"/>
-              <a:t>4/2/2026</a:t>
+              <a:t>4/4/2026</a:t>
             </a:fld>
             <a:endParaRPr lang="en-US"/>
           </a:p>
@@ -467,7 +501,7 @@
           <a:p>
             <a:fld id="{39DFAE05-33A5-42B2-8B0E-BC60315FEFBC}" type="datetimeFigureOut">
               <a:rPr lang="en-US" smtClean="0"/>
-              <a:t>4/2/2026</a:t>
+              <a:t>4/4/2026</a:t>
             </a:fld>
             <a:endParaRPr lang="en-US"/>
           </a:p>
@@ -675,7 +709,7 @@
           <a:p>
             <a:fld id="{39DFAE05-33A5-42B2-8B0E-BC60315FEFBC}" type="datetimeFigureOut">
               <a:rPr lang="en-US" smtClean="0"/>
-              <a:t>4/2/2026</a:t>
+              <a:t>4/4/2026</a:t>
             </a:fld>
             <a:endParaRPr lang="en-US"/>
           </a:p>
@@ -873,7 +907,7 @@
           <a:p>
             <a:fld id="{39DFAE05-33A5-42B2-8B0E-BC60315FEFBC}" type="datetimeFigureOut">
               <a:rPr lang="en-US" smtClean="0"/>
-              <a:t>4/2/2026</a:t>
+              <a:t>4/4/2026</a:t>
             </a:fld>
             <a:endParaRPr lang="en-US"/>
           </a:p>
@@ -1148,7 +1182,7 @@
           <a:p>
             <a:fld id="{39DFAE05-33A5-42B2-8B0E-BC60315FEFBC}" type="datetimeFigureOut">
               <a:rPr lang="en-US" smtClean="0"/>
-              <a:t>4/2/2026</a:t>
+              <a:t>4/4/2026</a:t>
             </a:fld>
             <a:endParaRPr lang="en-US"/>
           </a:p>
@@ -1413,7 +1447,7 @@
           <a:p>
             <a:fld id="{39DFAE05-33A5-42B2-8B0E-BC60315FEFBC}" type="datetimeFigureOut">
               <a:rPr lang="en-US" smtClean="0"/>
-              <a:t>4/2/2026</a:t>
+              <a:t>4/4/2026</a:t>
             </a:fld>
             <a:endParaRPr lang="en-US"/>
           </a:p>
@@ -1825,7 +1859,7 @@
           <a:p>
             <a:fld id="{39DFAE05-33A5-42B2-8B0E-BC60315FEFBC}" type="datetimeFigureOut">
               <a:rPr lang="en-US" smtClean="0"/>
-              <a:t>4/2/2026</a:t>
+              <a:t>4/4/2026</a:t>
             </a:fld>
             <a:endParaRPr lang="en-US"/>
           </a:p>
@@ -1966,7 +2000,7 @@
           <a:p>
             <a:fld id="{39DFAE05-33A5-42B2-8B0E-BC60315FEFBC}" type="datetimeFigureOut">
               <a:rPr lang="en-US" smtClean="0"/>
-              <a:t>4/2/2026</a:t>
+              <a:t>4/4/2026</a:t>
             </a:fld>
             <a:endParaRPr lang="en-US"/>
           </a:p>
@@ -2079,7 +2113,7 @@
           <a:p>
             <a:fld id="{39DFAE05-33A5-42B2-8B0E-BC60315FEFBC}" type="datetimeFigureOut">
               <a:rPr lang="en-US" smtClean="0"/>
-              <a:t>4/2/2026</a:t>
+              <a:t>4/4/2026</a:t>
             </a:fld>
             <a:endParaRPr lang="en-US"/>
           </a:p>
@@ -2390,7 +2424,7 @@
           <a:p>
             <a:fld id="{39DFAE05-33A5-42B2-8B0E-BC60315FEFBC}" type="datetimeFigureOut">
               <a:rPr lang="en-US" smtClean="0"/>
-              <a:t>4/2/2026</a:t>
+              <a:t>4/4/2026</a:t>
             </a:fld>
             <a:endParaRPr lang="en-US"/>
           </a:p>
@@ -2678,7 +2712,7 @@
           <a:p>
             <a:fld id="{39DFAE05-33A5-42B2-8B0E-BC60315FEFBC}" type="datetimeFigureOut">
               <a:rPr lang="en-US" smtClean="0"/>
-              <a:t>4/2/2026</a:t>
+              <a:t>4/4/2026</a:t>
             </a:fld>
             <a:endParaRPr lang="en-US"/>
           </a:p>
@@ -2919,7 +2953,7 @@
           <a:p>
             <a:fld id="{39DFAE05-33A5-42B2-8B0E-BC60315FEFBC}" type="datetimeFigureOut">
               <a:rPr lang="en-US" smtClean="0"/>
-              <a:t>4/2/2026</a:t>
+              <a:t>4/4/2026</a:t>
             </a:fld>
             <a:endParaRPr lang="en-US"/>
           </a:p>
@@ -4252,6 +4286,36 @@
         </p:nvPicPr>
         <p:blipFill>
           <a:blip r:embed="rId2"/>
+          <a:stretch>
+            <a:fillRect/>
+          </a:stretch>
+        </p:blipFill>
+        <p:spPr>
+          <a:xfrm>
+            <a:off x="0" y="431800"/>
+            <a:ext cx="12192000" cy="5994400"/>
+          </a:xfrm>
+          <a:prstGeom prst="rect">
+            <a:avLst/>
+          </a:prstGeom>
+        </p:spPr>
+      </p:pic>
+      <p:pic>
+        <p:nvPicPr>
+          <p:cNvPr id="3" name="Picture 2">
+            <a:extLst>
+              <a:ext uri="{FF2B5EF4-FFF2-40B4-BE49-F238E27FC236}">
+                <a16:creationId xmlns:a16="http://schemas.microsoft.com/office/drawing/2014/main" id="{3EFE962B-7112-2AEB-9DF7-54A235D3B9A2}"/>
+              </a:ext>
+            </a:extLst>
+          </p:cNvPr>
+          <p:cNvPicPr>
+            <a:picLocks noChangeAspect="1"/>
+          </p:cNvPicPr>
+          <p:nvPr/>
+        </p:nvPicPr>
+        <p:blipFill>
+          <a:blip r:embed="rId3"/>
           <a:stretch>
             <a:fillRect/>
           </a:stretch>

--- a/documents/Introduction.pptx
+++ b/documents/Introduction.pptx
@@ -14,13 +14,17 @@
     <p:sldId id="262" r:id="rId8"/>
     <p:sldId id="263" r:id="rId9"/>
     <p:sldId id="264" r:id="rId10"/>
-    <p:sldId id="265" r:id="rId11"/>
-    <p:sldId id="266" r:id="rId12"/>
-    <p:sldId id="267" r:id="rId13"/>
-    <p:sldId id="268" r:id="rId14"/>
-    <p:sldId id="269" r:id="rId15"/>
-    <p:sldId id="270" r:id="rId16"/>
-    <p:sldId id="271" r:id="rId17"/>
+    <p:sldId id="272" r:id="rId11"/>
+    <p:sldId id="273" r:id="rId12"/>
+    <p:sldId id="274" r:id="rId13"/>
+    <p:sldId id="275" r:id="rId14"/>
+    <p:sldId id="265" r:id="rId15"/>
+    <p:sldId id="266" r:id="rId16"/>
+    <p:sldId id="267" r:id="rId17"/>
+    <p:sldId id="268" r:id="rId18"/>
+    <p:sldId id="269" r:id="rId19"/>
+    <p:sldId id="270" r:id="rId20"/>
+    <p:sldId id="271" r:id="rId21"/>
   </p:sldIdLst>
   <p:sldSz cx="12192000" cy="6858000"/>
   <p:notesSz cx="6858000" cy="9144000"/>
@@ -131,23 +135,217 @@
 <pc:chgInfo xmlns:a="http://schemas.openxmlformats.org/drawingml/2006/main" xmlns:r="http://schemas.openxmlformats.org/officeDocument/2006/relationships" xmlns:ac="http://schemas.microsoft.com/office/drawing/2013/main/command" xmlns:pc="http://schemas.microsoft.com/office/powerpoint/2013/main/command">
   <pc:docChgLst>
     <pc:chgData name="Vaughn Staples" userId="9a5933822faaa4bf" providerId="LiveId" clId="{BB914C8C-BCA1-484B-9A1F-EBF33ADB071F}"/>
-    <pc:docChg chg="modSld">
-      <pc:chgData name="Vaughn Staples" userId="9a5933822faaa4bf" providerId="LiveId" clId="{BB914C8C-BCA1-484B-9A1F-EBF33ADB071F}" dt="2026-04-04T03:16:28.775" v="0" actId="22"/>
+    <pc:docChg chg="custSel addSld modSld">
+      <pc:chgData name="Vaughn Staples" userId="9a5933822faaa4bf" providerId="LiveId" clId="{BB914C8C-BCA1-484B-9A1F-EBF33ADB071F}" dt="2026-04-10T05:08:19.544" v="21" actId="22"/>
       <pc:docMkLst>
         <pc:docMk/>
       </pc:docMkLst>
-      <pc:sldChg chg="addSp mod">
-        <pc:chgData name="Vaughn Staples" userId="9a5933822faaa4bf" providerId="LiveId" clId="{BB914C8C-BCA1-484B-9A1F-EBF33ADB071F}" dt="2026-04-04T03:16:28.775" v="0" actId="22"/>
+      <pc:sldChg chg="addSp delSp mod">
+        <pc:chgData name="Vaughn Staples" userId="9a5933822faaa4bf" providerId="LiveId" clId="{BB914C8C-BCA1-484B-9A1F-EBF33ADB071F}" dt="2026-04-10T05:05:12.821" v="5" actId="22"/>
+        <pc:sldMkLst>
+          <pc:docMk/>
+          <pc:sldMk cId="2810269388" sldId="262"/>
+        </pc:sldMkLst>
+        <pc:picChg chg="add">
+          <ac:chgData name="Vaughn Staples" userId="9a5933822faaa4bf" providerId="LiveId" clId="{BB914C8C-BCA1-484B-9A1F-EBF33ADB071F}" dt="2026-04-10T05:05:12.821" v="5" actId="22"/>
+          <ac:picMkLst>
+            <pc:docMk/>
+            <pc:sldMk cId="2810269388" sldId="262"/>
+            <ac:picMk id="3" creationId="{ED1329CF-4FFE-3C8F-CEDA-20CDC93C1AAC}"/>
+          </ac:picMkLst>
+        </pc:picChg>
+        <pc:picChg chg="del">
+          <ac:chgData name="Vaughn Staples" userId="9a5933822faaa4bf" providerId="LiveId" clId="{BB914C8C-BCA1-484B-9A1F-EBF33ADB071F}" dt="2026-04-10T05:04:32.366" v="1" actId="478"/>
+          <ac:picMkLst>
+            <pc:docMk/>
+            <pc:sldMk cId="2810269388" sldId="262"/>
+            <ac:picMk id="5" creationId="{23BB00A9-1310-D9B9-58F6-53DD3161CC82}"/>
+          </ac:picMkLst>
+        </pc:picChg>
+      </pc:sldChg>
+      <pc:sldChg chg="addSp delSp mod">
+        <pc:chgData name="Vaughn Staples" userId="9a5933822faaa4bf" providerId="LiveId" clId="{BB914C8C-BCA1-484B-9A1F-EBF33ADB071F}" dt="2026-04-10T05:05:56.158" v="8" actId="22"/>
+        <pc:sldMkLst>
+          <pc:docMk/>
+          <pc:sldMk cId="142702223" sldId="263"/>
+        </pc:sldMkLst>
+        <pc:picChg chg="add del">
+          <ac:chgData name="Vaughn Staples" userId="9a5933822faaa4bf" providerId="LiveId" clId="{BB914C8C-BCA1-484B-9A1F-EBF33ADB071F}" dt="2026-04-10T05:05:41.730" v="7" actId="478"/>
+          <ac:picMkLst>
+            <pc:docMk/>
+            <pc:sldMk cId="142702223" sldId="263"/>
+            <ac:picMk id="3" creationId="{FFD69B28-11DB-6DB9-FB0C-F25DA0DB90D5}"/>
+          </ac:picMkLst>
+        </pc:picChg>
+        <pc:picChg chg="del">
+          <ac:chgData name="Vaughn Staples" userId="9a5933822faaa4bf" providerId="LiveId" clId="{BB914C8C-BCA1-484B-9A1F-EBF33ADB071F}" dt="2026-04-10T05:04:36.706" v="2" actId="478"/>
+          <ac:picMkLst>
+            <pc:docMk/>
+            <pc:sldMk cId="142702223" sldId="263"/>
+            <ac:picMk id="5" creationId="{90217EFF-CC06-CFB0-6736-E78C93AB3978}"/>
+          </ac:picMkLst>
+        </pc:picChg>
+        <pc:picChg chg="add">
+          <ac:chgData name="Vaughn Staples" userId="9a5933822faaa4bf" providerId="LiveId" clId="{BB914C8C-BCA1-484B-9A1F-EBF33ADB071F}" dt="2026-04-10T05:05:56.158" v="8" actId="22"/>
+          <ac:picMkLst>
+            <pc:docMk/>
+            <pc:sldMk cId="142702223" sldId="263"/>
+            <ac:picMk id="6" creationId="{0CF22EDD-E03B-EE11-9794-97797719173D}"/>
+          </ac:picMkLst>
+        </pc:picChg>
+      </pc:sldChg>
+      <pc:sldChg chg="addSp delSp mod">
+        <pc:chgData name="Vaughn Staples" userId="9a5933822faaa4bf" providerId="LiveId" clId="{BB914C8C-BCA1-484B-9A1F-EBF33ADB071F}" dt="2026-04-10T05:06:25.809" v="9" actId="22"/>
         <pc:sldMkLst>
           <pc:docMk/>
           <pc:sldMk cId="2878559713" sldId="264"/>
         </pc:sldMkLst>
-        <pc:picChg chg="add">
-          <ac:chgData name="Vaughn Staples" userId="9a5933822faaa4bf" providerId="LiveId" clId="{BB914C8C-BCA1-484B-9A1F-EBF33ADB071F}" dt="2026-04-04T03:16:28.775" v="0" actId="22"/>
+        <pc:picChg chg="add del">
+          <ac:chgData name="Vaughn Staples" userId="9a5933822faaa4bf" providerId="LiveId" clId="{BB914C8C-BCA1-484B-9A1F-EBF33ADB071F}" dt="2026-04-10T05:04:38.850" v="3" actId="478"/>
           <ac:picMkLst>
             <pc:docMk/>
             <pc:sldMk cId="2878559713" sldId="264"/>
             <ac:picMk id="3" creationId="{3EFE962B-7112-2AEB-9DF7-54A235D3B9A2}"/>
+          </ac:picMkLst>
+        </pc:picChg>
+        <pc:picChg chg="add">
+          <ac:chgData name="Vaughn Staples" userId="9a5933822faaa4bf" providerId="LiveId" clId="{BB914C8C-BCA1-484B-9A1F-EBF33ADB071F}" dt="2026-04-10T05:06:25.809" v="9" actId="22"/>
+          <ac:picMkLst>
+            <pc:docMk/>
+            <pc:sldMk cId="2878559713" sldId="264"/>
+            <ac:picMk id="4" creationId="{F533E226-7E6D-D630-5ACE-B83CCC733B34}"/>
+          </ac:picMkLst>
+        </pc:picChg>
+        <pc:picChg chg="del">
+          <ac:chgData name="Vaughn Staples" userId="9a5933822faaa4bf" providerId="LiveId" clId="{BB914C8C-BCA1-484B-9A1F-EBF33ADB071F}" dt="2026-04-10T05:04:41.882" v="4" actId="478"/>
+          <ac:picMkLst>
+            <pc:docMk/>
+            <pc:sldMk cId="2878559713" sldId="264"/>
+            <ac:picMk id="5" creationId="{84795C6E-DD28-241B-D4C3-C555E695F657}"/>
+          </ac:picMkLst>
+        </pc:picChg>
+      </pc:sldChg>
+      <pc:sldChg chg="addSp delSp new mod">
+        <pc:chgData name="Vaughn Staples" userId="9a5933822faaa4bf" providerId="LiveId" clId="{BB914C8C-BCA1-484B-9A1F-EBF33ADB071F}" dt="2026-04-10T05:06:58.152" v="12" actId="22"/>
+        <pc:sldMkLst>
+          <pc:docMk/>
+          <pc:sldMk cId="4151877294" sldId="272"/>
+        </pc:sldMkLst>
+        <pc:spChg chg="del">
+          <ac:chgData name="Vaughn Staples" userId="9a5933822faaa4bf" providerId="LiveId" clId="{BB914C8C-BCA1-484B-9A1F-EBF33ADB071F}" dt="2026-04-10T05:06:32.895" v="11" actId="478"/>
+          <ac:spMkLst>
+            <pc:docMk/>
+            <pc:sldMk cId="4151877294" sldId="272"/>
+            <ac:spMk id="2" creationId="{6ABF9F45-B082-56E9-5AB8-3DA401B715EA}"/>
+          </ac:spMkLst>
+        </pc:spChg>
+        <pc:spChg chg="del">
+          <ac:chgData name="Vaughn Staples" userId="9a5933822faaa4bf" providerId="LiveId" clId="{BB914C8C-BCA1-484B-9A1F-EBF33ADB071F}" dt="2026-04-10T05:06:32.895" v="11" actId="478"/>
+          <ac:spMkLst>
+            <pc:docMk/>
+            <pc:sldMk cId="4151877294" sldId="272"/>
+            <ac:spMk id="3" creationId="{6CE2C0AA-DE65-29E7-CA27-5219EB421E7E}"/>
+          </ac:spMkLst>
+        </pc:spChg>
+        <pc:picChg chg="add">
+          <ac:chgData name="Vaughn Staples" userId="9a5933822faaa4bf" providerId="LiveId" clId="{BB914C8C-BCA1-484B-9A1F-EBF33ADB071F}" dt="2026-04-10T05:06:58.152" v="12" actId="22"/>
+          <ac:picMkLst>
+            <pc:docMk/>
+            <pc:sldMk cId="4151877294" sldId="272"/>
+            <ac:picMk id="5" creationId="{D2864D2F-B1CC-82B7-484F-A38B3383105F}"/>
+          </ac:picMkLst>
+        </pc:picChg>
+      </pc:sldChg>
+      <pc:sldChg chg="addSp delSp new mod">
+        <pc:chgData name="Vaughn Staples" userId="9a5933822faaa4bf" providerId="LiveId" clId="{BB914C8C-BCA1-484B-9A1F-EBF33ADB071F}" dt="2026-04-10T05:07:21.824" v="15" actId="22"/>
+        <pc:sldMkLst>
+          <pc:docMk/>
+          <pc:sldMk cId="1866357744" sldId="273"/>
+        </pc:sldMkLst>
+        <pc:spChg chg="del">
+          <ac:chgData name="Vaughn Staples" userId="9a5933822faaa4bf" providerId="LiveId" clId="{BB914C8C-BCA1-484B-9A1F-EBF33ADB071F}" dt="2026-04-10T05:07:20.619" v="14" actId="478"/>
+          <ac:spMkLst>
+            <pc:docMk/>
+            <pc:sldMk cId="1866357744" sldId="273"/>
+            <ac:spMk id="2" creationId="{B9691869-FEEB-F3B6-FB4F-ED5AAB4EDCE4}"/>
+          </ac:spMkLst>
+        </pc:spChg>
+        <pc:spChg chg="del">
+          <ac:chgData name="Vaughn Staples" userId="9a5933822faaa4bf" providerId="LiveId" clId="{BB914C8C-BCA1-484B-9A1F-EBF33ADB071F}" dt="2026-04-10T05:07:20.619" v="14" actId="478"/>
+          <ac:spMkLst>
+            <pc:docMk/>
+            <pc:sldMk cId="1866357744" sldId="273"/>
+            <ac:spMk id="3" creationId="{3B8A60E9-8A63-4A06-6065-2A341610CAE7}"/>
+          </ac:spMkLst>
+        </pc:spChg>
+        <pc:picChg chg="add">
+          <ac:chgData name="Vaughn Staples" userId="9a5933822faaa4bf" providerId="LiveId" clId="{BB914C8C-BCA1-484B-9A1F-EBF33ADB071F}" dt="2026-04-10T05:07:21.824" v="15" actId="22"/>
+          <ac:picMkLst>
+            <pc:docMk/>
+            <pc:sldMk cId="1866357744" sldId="273"/>
+            <ac:picMk id="5" creationId="{990CB799-A5C2-9801-B821-B2C6A61AE93F}"/>
+          </ac:picMkLst>
+        </pc:picChg>
+      </pc:sldChg>
+      <pc:sldChg chg="addSp delSp new mod">
+        <pc:chgData name="Vaughn Staples" userId="9a5933822faaa4bf" providerId="LiveId" clId="{BB914C8C-BCA1-484B-9A1F-EBF33ADB071F}" dt="2026-04-10T05:08:04.851" v="18" actId="22"/>
+        <pc:sldMkLst>
+          <pc:docMk/>
+          <pc:sldMk cId="539954587" sldId="274"/>
+        </pc:sldMkLst>
+        <pc:spChg chg="del">
+          <ac:chgData name="Vaughn Staples" userId="9a5933822faaa4bf" providerId="LiveId" clId="{BB914C8C-BCA1-484B-9A1F-EBF33ADB071F}" dt="2026-04-10T05:08:03.654" v="17" actId="478"/>
+          <ac:spMkLst>
+            <pc:docMk/>
+            <pc:sldMk cId="539954587" sldId="274"/>
+            <ac:spMk id="2" creationId="{0EF496BB-9D10-4DEA-4D51-69B22C431615}"/>
+          </ac:spMkLst>
+        </pc:spChg>
+        <pc:spChg chg="del">
+          <ac:chgData name="Vaughn Staples" userId="9a5933822faaa4bf" providerId="LiveId" clId="{BB914C8C-BCA1-484B-9A1F-EBF33ADB071F}" dt="2026-04-10T05:08:03.654" v="17" actId="478"/>
+          <ac:spMkLst>
+            <pc:docMk/>
+            <pc:sldMk cId="539954587" sldId="274"/>
+            <ac:spMk id="3" creationId="{597DB1DC-6185-3550-96E2-A40CC1BA5AD1}"/>
+          </ac:spMkLst>
+        </pc:spChg>
+        <pc:picChg chg="add">
+          <ac:chgData name="Vaughn Staples" userId="9a5933822faaa4bf" providerId="LiveId" clId="{BB914C8C-BCA1-484B-9A1F-EBF33ADB071F}" dt="2026-04-10T05:08:04.851" v="18" actId="22"/>
+          <ac:picMkLst>
+            <pc:docMk/>
+            <pc:sldMk cId="539954587" sldId="274"/>
+            <ac:picMk id="5" creationId="{8D8DEFED-3D70-8789-A897-4526A037A1B4}"/>
+          </ac:picMkLst>
+        </pc:picChg>
+      </pc:sldChg>
+      <pc:sldChg chg="addSp delSp new mod">
+        <pc:chgData name="Vaughn Staples" userId="9a5933822faaa4bf" providerId="LiveId" clId="{BB914C8C-BCA1-484B-9A1F-EBF33ADB071F}" dt="2026-04-10T05:08:19.544" v="21" actId="22"/>
+        <pc:sldMkLst>
+          <pc:docMk/>
+          <pc:sldMk cId="2248252599" sldId="275"/>
+        </pc:sldMkLst>
+        <pc:spChg chg="del">
+          <ac:chgData name="Vaughn Staples" userId="9a5933822faaa4bf" providerId="LiveId" clId="{BB914C8C-BCA1-484B-9A1F-EBF33ADB071F}" dt="2026-04-10T05:08:12.534" v="20" actId="478"/>
+          <ac:spMkLst>
+            <pc:docMk/>
+            <pc:sldMk cId="2248252599" sldId="275"/>
+            <ac:spMk id="2" creationId="{31BFB366-E348-7E7F-8458-D1DE898B3CAE}"/>
+          </ac:spMkLst>
+        </pc:spChg>
+        <pc:spChg chg="del">
+          <ac:chgData name="Vaughn Staples" userId="9a5933822faaa4bf" providerId="LiveId" clId="{BB914C8C-BCA1-484B-9A1F-EBF33ADB071F}" dt="2026-04-10T05:08:12.534" v="20" actId="478"/>
+          <ac:spMkLst>
+            <pc:docMk/>
+            <pc:sldMk cId="2248252599" sldId="275"/>
+            <ac:spMk id="3" creationId="{F34D9536-2147-60D5-523C-81B470388CBA}"/>
+          </ac:spMkLst>
+        </pc:spChg>
+        <pc:picChg chg="add">
+          <ac:chgData name="Vaughn Staples" userId="9a5933822faaa4bf" providerId="LiveId" clId="{BB914C8C-BCA1-484B-9A1F-EBF33ADB071F}" dt="2026-04-10T05:08:19.544" v="21" actId="22"/>
+          <ac:picMkLst>
+            <pc:docMk/>
+            <pc:sldMk cId="2248252599" sldId="275"/>
+            <ac:picMk id="5" creationId="{FFA88C58-DFD7-5EFA-AFBC-D5D7C127CCB8}"/>
           </ac:picMkLst>
         </pc:picChg>
       </pc:sldChg>
@@ -303,7 +501,7 @@
           <a:p>
             <a:fld id="{39DFAE05-33A5-42B2-8B0E-BC60315FEFBC}" type="datetimeFigureOut">
               <a:rPr lang="en-US" smtClean="0"/>
-              <a:t>4/4/2026</a:t>
+              <a:t>4/10/2026</a:t>
             </a:fld>
             <a:endParaRPr lang="en-US"/>
           </a:p>
@@ -501,7 +699,7 @@
           <a:p>
             <a:fld id="{39DFAE05-33A5-42B2-8B0E-BC60315FEFBC}" type="datetimeFigureOut">
               <a:rPr lang="en-US" smtClean="0"/>
-              <a:t>4/4/2026</a:t>
+              <a:t>4/10/2026</a:t>
             </a:fld>
             <a:endParaRPr lang="en-US"/>
           </a:p>
@@ -709,7 +907,7 @@
           <a:p>
             <a:fld id="{39DFAE05-33A5-42B2-8B0E-BC60315FEFBC}" type="datetimeFigureOut">
               <a:rPr lang="en-US" smtClean="0"/>
-              <a:t>4/4/2026</a:t>
+              <a:t>4/10/2026</a:t>
             </a:fld>
             <a:endParaRPr lang="en-US"/>
           </a:p>
@@ -907,7 +1105,7 @@
           <a:p>
             <a:fld id="{39DFAE05-33A5-42B2-8B0E-BC60315FEFBC}" type="datetimeFigureOut">
               <a:rPr lang="en-US" smtClean="0"/>
-              <a:t>4/4/2026</a:t>
+              <a:t>4/10/2026</a:t>
             </a:fld>
             <a:endParaRPr lang="en-US"/>
           </a:p>
@@ -1182,7 +1380,7 @@
           <a:p>
             <a:fld id="{39DFAE05-33A5-42B2-8B0E-BC60315FEFBC}" type="datetimeFigureOut">
               <a:rPr lang="en-US" smtClean="0"/>
-              <a:t>4/4/2026</a:t>
+              <a:t>4/10/2026</a:t>
             </a:fld>
             <a:endParaRPr lang="en-US"/>
           </a:p>
@@ -1447,7 +1645,7 @@
           <a:p>
             <a:fld id="{39DFAE05-33A5-42B2-8B0E-BC60315FEFBC}" type="datetimeFigureOut">
               <a:rPr lang="en-US" smtClean="0"/>
-              <a:t>4/4/2026</a:t>
+              <a:t>4/10/2026</a:t>
             </a:fld>
             <a:endParaRPr lang="en-US"/>
           </a:p>
@@ -1859,7 +2057,7 @@
           <a:p>
             <a:fld id="{39DFAE05-33A5-42B2-8B0E-BC60315FEFBC}" type="datetimeFigureOut">
               <a:rPr lang="en-US" smtClean="0"/>
-              <a:t>4/4/2026</a:t>
+              <a:t>4/10/2026</a:t>
             </a:fld>
             <a:endParaRPr lang="en-US"/>
           </a:p>
@@ -2000,7 +2198,7 @@
           <a:p>
             <a:fld id="{39DFAE05-33A5-42B2-8B0E-BC60315FEFBC}" type="datetimeFigureOut">
               <a:rPr lang="en-US" smtClean="0"/>
-              <a:t>4/4/2026</a:t>
+              <a:t>4/10/2026</a:t>
             </a:fld>
             <a:endParaRPr lang="en-US"/>
           </a:p>
@@ -2113,7 +2311,7 @@
           <a:p>
             <a:fld id="{39DFAE05-33A5-42B2-8B0E-BC60315FEFBC}" type="datetimeFigureOut">
               <a:rPr lang="en-US" smtClean="0"/>
-              <a:t>4/4/2026</a:t>
+              <a:t>4/10/2026</a:t>
             </a:fld>
             <a:endParaRPr lang="en-US"/>
           </a:p>
@@ -2424,7 +2622,7 @@
           <a:p>
             <a:fld id="{39DFAE05-33A5-42B2-8B0E-BC60315FEFBC}" type="datetimeFigureOut">
               <a:rPr lang="en-US" smtClean="0"/>
-              <a:t>4/4/2026</a:t>
+              <a:t>4/10/2026</a:t>
             </a:fld>
             <a:endParaRPr lang="en-US"/>
           </a:p>
@@ -2712,7 +2910,7 @@
           <a:p>
             <a:fld id="{39DFAE05-33A5-42B2-8B0E-BC60315FEFBC}" type="datetimeFigureOut">
               <a:rPr lang="en-US" smtClean="0"/>
-              <a:t>4/4/2026</a:t>
+              <a:t>4/10/2026</a:t>
             </a:fld>
             <a:endParaRPr lang="en-US"/>
           </a:p>
@@ -2953,7 +3151,7 @@
           <a:p>
             <a:fld id="{39DFAE05-33A5-42B2-8B0E-BC60315FEFBC}" type="datetimeFigureOut">
               <a:rPr lang="en-US" smtClean="0"/>
-              <a:t>4/4/2026</a:t>
+              <a:t>4/10/2026</a:t>
             </a:fld>
             <a:endParaRPr lang="en-US"/>
           </a:p>
@@ -3435,6 +3633,246 @@
           <p:cNvPr id="5" name="Picture 4">
             <a:extLst>
               <a:ext uri="{FF2B5EF4-FFF2-40B4-BE49-F238E27FC236}">
+                <a16:creationId xmlns:a16="http://schemas.microsoft.com/office/drawing/2014/main" id="{D2864D2F-B1CC-82B7-484F-A38B3383105F}"/>
+              </a:ext>
+            </a:extLst>
+          </p:cNvPr>
+          <p:cNvPicPr>
+            <a:picLocks noChangeAspect="1"/>
+          </p:cNvPicPr>
+          <p:nvPr/>
+        </p:nvPicPr>
+        <p:blipFill>
+          <a:blip r:embed="rId2"/>
+          <a:stretch>
+            <a:fillRect/>
+          </a:stretch>
+        </p:blipFill>
+        <p:spPr>
+          <a:xfrm>
+            <a:off x="0" y="431800"/>
+            <a:ext cx="12192000" cy="5994400"/>
+          </a:xfrm>
+          <a:prstGeom prst="rect">
+            <a:avLst/>
+          </a:prstGeom>
+        </p:spPr>
+      </p:pic>
+    </p:spTree>
+    <p:extLst>
+      <p:ext uri="{BB962C8B-B14F-4D97-AF65-F5344CB8AC3E}">
+        <p14:creationId xmlns:p14="http://schemas.microsoft.com/office/powerpoint/2010/main" val="4151877294"/>
+      </p:ext>
+    </p:extLst>
+  </p:cSld>
+  <p:clrMapOvr>
+    <a:masterClrMapping/>
+  </p:clrMapOvr>
+</p:sld>
+</file>
+
+<file path=ppt/slides/slide11.xml><?xml version="1.0" encoding="utf-8"?>
+<p:sld xmlns:a="http://schemas.openxmlformats.org/drawingml/2006/main" xmlns:r="http://schemas.openxmlformats.org/officeDocument/2006/relationships" xmlns:p="http://schemas.openxmlformats.org/presentationml/2006/main">
+  <p:cSld>
+    <p:spTree>
+      <p:nvGrpSpPr>
+        <p:cNvPr id="1" name=""/>
+        <p:cNvGrpSpPr/>
+        <p:nvPr/>
+      </p:nvGrpSpPr>
+      <p:grpSpPr>
+        <a:xfrm>
+          <a:off x="0" y="0"/>
+          <a:ext cx="0" cy="0"/>
+          <a:chOff x="0" y="0"/>
+          <a:chExt cx="0" cy="0"/>
+        </a:xfrm>
+      </p:grpSpPr>
+      <p:pic>
+        <p:nvPicPr>
+          <p:cNvPr id="5" name="Picture 4">
+            <a:extLst>
+              <a:ext uri="{FF2B5EF4-FFF2-40B4-BE49-F238E27FC236}">
+                <a16:creationId xmlns:a16="http://schemas.microsoft.com/office/drawing/2014/main" id="{990CB799-A5C2-9801-B821-B2C6A61AE93F}"/>
+              </a:ext>
+            </a:extLst>
+          </p:cNvPr>
+          <p:cNvPicPr>
+            <a:picLocks noChangeAspect="1"/>
+          </p:cNvPicPr>
+          <p:nvPr/>
+        </p:nvPicPr>
+        <p:blipFill>
+          <a:blip r:embed="rId2"/>
+          <a:stretch>
+            <a:fillRect/>
+          </a:stretch>
+        </p:blipFill>
+        <p:spPr>
+          <a:xfrm>
+            <a:off x="0" y="431800"/>
+            <a:ext cx="12192000" cy="5994400"/>
+          </a:xfrm>
+          <a:prstGeom prst="rect">
+            <a:avLst/>
+          </a:prstGeom>
+        </p:spPr>
+      </p:pic>
+    </p:spTree>
+    <p:extLst>
+      <p:ext uri="{BB962C8B-B14F-4D97-AF65-F5344CB8AC3E}">
+        <p14:creationId xmlns:p14="http://schemas.microsoft.com/office/powerpoint/2010/main" val="1866357744"/>
+      </p:ext>
+    </p:extLst>
+  </p:cSld>
+  <p:clrMapOvr>
+    <a:masterClrMapping/>
+  </p:clrMapOvr>
+</p:sld>
+</file>
+
+<file path=ppt/slides/slide12.xml><?xml version="1.0" encoding="utf-8"?>
+<p:sld xmlns:a="http://schemas.openxmlformats.org/drawingml/2006/main" xmlns:r="http://schemas.openxmlformats.org/officeDocument/2006/relationships" xmlns:p="http://schemas.openxmlformats.org/presentationml/2006/main">
+  <p:cSld>
+    <p:spTree>
+      <p:nvGrpSpPr>
+        <p:cNvPr id="1" name=""/>
+        <p:cNvGrpSpPr/>
+        <p:nvPr/>
+      </p:nvGrpSpPr>
+      <p:grpSpPr>
+        <a:xfrm>
+          <a:off x="0" y="0"/>
+          <a:ext cx="0" cy="0"/>
+          <a:chOff x="0" y="0"/>
+          <a:chExt cx="0" cy="0"/>
+        </a:xfrm>
+      </p:grpSpPr>
+      <p:pic>
+        <p:nvPicPr>
+          <p:cNvPr id="5" name="Picture 4">
+            <a:extLst>
+              <a:ext uri="{FF2B5EF4-FFF2-40B4-BE49-F238E27FC236}">
+                <a16:creationId xmlns:a16="http://schemas.microsoft.com/office/drawing/2014/main" id="{8D8DEFED-3D70-8789-A897-4526A037A1B4}"/>
+              </a:ext>
+            </a:extLst>
+          </p:cNvPr>
+          <p:cNvPicPr>
+            <a:picLocks noChangeAspect="1"/>
+          </p:cNvPicPr>
+          <p:nvPr/>
+        </p:nvPicPr>
+        <p:blipFill>
+          <a:blip r:embed="rId2"/>
+          <a:stretch>
+            <a:fillRect/>
+          </a:stretch>
+        </p:blipFill>
+        <p:spPr>
+          <a:xfrm>
+            <a:off x="0" y="431800"/>
+            <a:ext cx="12192000" cy="5994400"/>
+          </a:xfrm>
+          <a:prstGeom prst="rect">
+            <a:avLst/>
+          </a:prstGeom>
+        </p:spPr>
+      </p:pic>
+    </p:spTree>
+    <p:extLst>
+      <p:ext uri="{BB962C8B-B14F-4D97-AF65-F5344CB8AC3E}">
+        <p14:creationId xmlns:p14="http://schemas.microsoft.com/office/powerpoint/2010/main" val="539954587"/>
+      </p:ext>
+    </p:extLst>
+  </p:cSld>
+  <p:clrMapOvr>
+    <a:masterClrMapping/>
+  </p:clrMapOvr>
+</p:sld>
+</file>
+
+<file path=ppt/slides/slide13.xml><?xml version="1.0" encoding="utf-8"?>
+<p:sld xmlns:a="http://schemas.openxmlformats.org/drawingml/2006/main" xmlns:r="http://schemas.openxmlformats.org/officeDocument/2006/relationships" xmlns:p="http://schemas.openxmlformats.org/presentationml/2006/main">
+  <p:cSld>
+    <p:spTree>
+      <p:nvGrpSpPr>
+        <p:cNvPr id="1" name=""/>
+        <p:cNvGrpSpPr/>
+        <p:nvPr/>
+      </p:nvGrpSpPr>
+      <p:grpSpPr>
+        <a:xfrm>
+          <a:off x="0" y="0"/>
+          <a:ext cx="0" cy="0"/>
+          <a:chOff x="0" y="0"/>
+          <a:chExt cx="0" cy="0"/>
+        </a:xfrm>
+      </p:grpSpPr>
+      <p:pic>
+        <p:nvPicPr>
+          <p:cNvPr id="5" name="Picture 4">
+            <a:extLst>
+              <a:ext uri="{FF2B5EF4-FFF2-40B4-BE49-F238E27FC236}">
+                <a16:creationId xmlns:a16="http://schemas.microsoft.com/office/drawing/2014/main" id="{FFA88C58-DFD7-5EFA-AFBC-D5D7C127CCB8}"/>
+              </a:ext>
+            </a:extLst>
+          </p:cNvPr>
+          <p:cNvPicPr>
+            <a:picLocks noChangeAspect="1"/>
+          </p:cNvPicPr>
+          <p:nvPr/>
+        </p:nvPicPr>
+        <p:blipFill>
+          <a:blip r:embed="rId2"/>
+          <a:stretch>
+            <a:fillRect/>
+          </a:stretch>
+        </p:blipFill>
+        <p:spPr>
+          <a:xfrm>
+            <a:off x="0" y="431800"/>
+            <a:ext cx="12192000" cy="5994400"/>
+          </a:xfrm>
+          <a:prstGeom prst="rect">
+            <a:avLst/>
+          </a:prstGeom>
+        </p:spPr>
+      </p:pic>
+    </p:spTree>
+    <p:extLst>
+      <p:ext uri="{BB962C8B-B14F-4D97-AF65-F5344CB8AC3E}">
+        <p14:creationId xmlns:p14="http://schemas.microsoft.com/office/powerpoint/2010/main" val="2248252599"/>
+      </p:ext>
+    </p:extLst>
+  </p:cSld>
+  <p:clrMapOvr>
+    <a:masterClrMapping/>
+  </p:clrMapOvr>
+</p:sld>
+</file>
+
+<file path=ppt/slides/slide14.xml><?xml version="1.0" encoding="utf-8"?>
+<p:sld xmlns:a="http://schemas.openxmlformats.org/drawingml/2006/main" xmlns:r="http://schemas.openxmlformats.org/officeDocument/2006/relationships" xmlns:p="http://schemas.openxmlformats.org/presentationml/2006/main">
+  <p:cSld>
+    <p:spTree>
+      <p:nvGrpSpPr>
+        <p:cNvPr id="1" name=""/>
+        <p:cNvGrpSpPr/>
+        <p:nvPr/>
+      </p:nvGrpSpPr>
+      <p:grpSpPr>
+        <a:xfrm>
+          <a:off x="0" y="0"/>
+          <a:ext cx="0" cy="0"/>
+          <a:chOff x="0" y="0"/>
+          <a:chExt cx="0" cy="0"/>
+        </a:xfrm>
+      </p:grpSpPr>
+      <p:pic>
+        <p:nvPicPr>
+          <p:cNvPr id="5" name="Picture 4">
+            <a:extLst>
+              <a:ext uri="{FF2B5EF4-FFF2-40B4-BE49-F238E27FC236}">
                 <a16:creationId xmlns:a16="http://schemas.microsoft.com/office/drawing/2014/main" id="{2EE1465C-4BF1-06FB-9261-47A01142E1A8}"/>
               </a:ext>
             </a:extLst>
@@ -3473,7 +3911,7 @@
 </p:sld>
 </file>
 
-<file path=ppt/slides/slide11.xml><?xml version="1.0" encoding="utf-8"?>
+<file path=ppt/slides/slide15.xml><?xml version="1.0" encoding="utf-8"?>
 <p:sld xmlns:a="http://schemas.openxmlformats.org/drawingml/2006/main" xmlns:r="http://schemas.openxmlformats.org/officeDocument/2006/relationships" xmlns:p="http://schemas.openxmlformats.org/presentationml/2006/main">
   <p:cSld>
     <p:spTree>
@@ -3533,7 +3971,7 @@
 </p:sld>
 </file>
 
-<file path=ppt/slides/slide12.xml><?xml version="1.0" encoding="utf-8"?>
+<file path=ppt/slides/slide16.xml><?xml version="1.0" encoding="utf-8"?>
 <p:sld xmlns:a="http://schemas.openxmlformats.org/drawingml/2006/main" xmlns:r="http://schemas.openxmlformats.org/officeDocument/2006/relationships" xmlns:p="http://schemas.openxmlformats.org/presentationml/2006/main">
   <p:cSld>
     <p:spTree>
@@ -3593,7 +4031,7 @@
 </p:sld>
 </file>
 
-<file path=ppt/slides/slide13.xml><?xml version="1.0" encoding="utf-8"?>
+<file path=ppt/slides/slide17.xml><?xml version="1.0" encoding="utf-8"?>
 <p:sld xmlns:a="http://schemas.openxmlformats.org/drawingml/2006/main" xmlns:r="http://schemas.openxmlformats.org/officeDocument/2006/relationships" xmlns:p="http://schemas.openxmlformats.org/presentationml/2006/main">
   <p:cSld>
     <p:spTree>
@@ -3653,7 +4091,7 @@
 </p:sld>
 </file>
 
-<file path=ppt/slides/slide14.xml><?xml version="1.0" encoding="utf-8"?>
+<file path=ppt/slides/slide18.xml><?xml version="1.0" encoding="utf-8"?>
 <p:sld xmlns:a="http://schemas.openxmlformats.org/drawingml/2006/main" xmlns:r="http://schemas.openxmlformats.org/officeDocument/2006/relationships" xmlns:p="http://schemas.openxmlformats.org/presentationml/2006/main">
   <p:cSld>
     <p:spTree>
@@ -3713,7 +4151,7 @@
 </p:sld>
 </file>
 
-<file path=ppt/slides/slide15.xml><?xml version="1.0" encoding="utf-8"?>
+<file path=ppt/slides/slide19.xml><?xml version="1.0" encoding="utf-8"?>
 <p:sld xmlns:a="http://schemas.openxmlformats.org/drawingml/2006/main" xmlns:r="http://schemas.openxmlformats.org/officeDocument/2006/relationships" xmlns:p="http://schemas.openxmlformats.org/presentationml/2006/main">
   <p:cSld>
     <p:spTree>
@@ -3773,7 +4211,67 @@
 </p:sld>
 </file>
 
-<file path=ppt/slides/slide16.xml><?xml version="1.0" encoding="utf-8"?>
+<file path=ppt/slides/slide2.xml><?xml version="1.0" encoding="utf-8"?>
+<p:sld xmlns:a="http://schemas.openxmlformats.org/drawingml/2006/main" xmlns:r="http://schemas.openxmlformats.org/officeDocument/2006/relationships" xmlns:p="http://schemas.openxmlformats.org/presentationml/2006/main">
+  <p:cSld>
+    <p:spTree>
+      <p:nvGrpSpPr>
+        <p:cNvPr id="1" name=""/>
+        <p:cNvGrpSpPr/>
+        <p:nvPr/>
+      </p:nvGrpSpPr>
+      <p:grpSpPr>
+        <a:xfrm>
+          <a:off x="0" y="0"/>
+          <a:ext cx="0" cy="0"/>
+          <a:chOff x="0" y="0"/>
+          <a:chExt cx="0" cy="0"/>
+        </a:xfrm>
+      </p:grpSpPr>
+      <p:pic>
+        <p:nvPicPr>
+          <p:cNvPr id="5" name="Picture 4">
+            <a:extLst>
+              <a:ext uri="{FF2B5EF4-FFF2-40B4-BE49-F238E27FC236}">
+                <a16:creationId xmlns:a16="http://schemas.microsoft.com/office/drawing/2014/main" id="{846FB348-25E4-F65A-8D24-D7F709708FFD}"/>
+              </a:ext>
+            </a:extLst>
+          </p:cNvPr>
+          <p:cNvPicPr>
+            <a:picLocks noChangeAspect="1"/>
+          </p:cNvPicPr>
+          <p:nvPr/>
+        </p:nvPicPr>
+        <p:blipFill>
+          <a:blip r:embed="rId2"/>
+          <a:stretch>
+            <a:fillRect/>
+          </a:stretch>
+        </p:blipFill>
+        <p:spPr>
+          <a:xfrm>
+            <a:off x="0" y="431800"/>
+            <a:ext cx="12192000" cy="5994400"/>
+          </a:xfrm>
+          <a:prstGeom prst="rect">
+            <a:avLst/>
+          </a:prstGeom>
+        </p:spPr>
+      </p:pic>
+    </p:spTree>
+    <p:extLst>
+      <p:ext uri="{BB962C8B-B14F-4D97-AF65-F5344CB8AC3E}">
+        <p14:creationId xmlns:p14="http://schemas.microsoft.com/office/powerpoint/2010/main" val="364666111"/>
+      </p:ext>
+    </p:extLst>
+  </p:cSld>
+  <p:clrMapOvr>
+    <a:masterClrMapping/>
+  </p:clrMapOvr>
+</p:sld>
+</file>
+
+<file path=ppt/slides/slide20.xml><?xml version="1.0" encoding="utf-8"?>
 <p:sld xmlns:a="http://schemas.openxmlformats.org/drawingml/2006/main" xmlns:r="http://schemas.openxmlformats.org/officeDocument/2006/relationships" xmlns:p="http://schemas.openxmlformats.org/presentationml/2006/main">
   <p:cSld>
     <p:spTree>
@@ -3824,66 +4322,6 @@
     <p:extLst>
       <p:ext uri="{BB962C8B-B14F-4D97-AF65-F5344CB8AC3E}">
         <p14:creationId xmlns:p14="http://schemas.microsoft.com/office/powerpoint/2010/main" val="3217210439"/>
-      </p:ext>
-    </p:extLst>
-  </p:cSld>
-  <p:clrMapOvr>
-    <a:masterClrMapping/>
-  </p:clrMapOvr>
-</p:sld>
-</file>
-
-<file path=ppt/slides/slide2.xml><?xml version="1.0" encoding="utf-8"?>
-<p:sld xmlns:a="http://schemas.openxmlformats.org/drawingml/2006/main" xmlns:r="http://schemas.openxmlformats.org/officeDocument/2006/relationships" xmlns:p="http://schemas.openxmlformats.org/presentationml/2006/main">
-  <p:cSld>
-    <p:spTree>
-      <p:nvGrpSpPr>
-        <p:cNvPr id="1" name=""/>
-        <p:cNvGrpSpPr/>
-        <p:nvPr/>
-      </p:nvGrpSpPr>
-      <p:grpSpPr>
-        <a:xfrm>
-          <a:off x="0" y="0"/>
-          <a:ext cx="0" cy="0"/>
-          <a:chOff x="0" y="0"/>
-          <a:chExt cx="0" cy="0"/>
-        </a:xfrm>
-      </p:grpSpPr>
-      <p:pic>
-        <p:nvPicPr>
-          <p:cNvPr id="5" name="Picture 4">
-            <a:extLst>
-              <a:ext uri="{FF2B5EF4-FFF2-40B4-BE49-F238E27FC236}">
-                <a16:creationId xmlns:a16="http://schemas.microsoft.com/office/drawing/2014/main" id="{846FB348-25E4-F65A-8D24-D7F709708FFD}"/>
-              </a:ext>
-            </a:extLst>
-          </p:cNvPr>
-          <p:cNvPicPr>
-            <a:picLocks noChangeAspect="1"/>
-          </p:cNvPicPr>
-          <p:nvPr/>
-        </p:nvPicPr>
-        <p:blipFill>
-          <a:blip r:embed="rId2"/>
-          <a:stretch>
-            <a:fillRect/>
-          </a:stretch>
-        </p:blipFill>
-        <p:spPr>
-          <a:xfrm>
-            <a:off x="0" y="431800"/>
-            <a:ext cx="12192000" cy="5994400"/>
-          </a:xfrm>
-          <a:prstGeom prst="rect">
-            <a:avLst/>
-          </a:prstGeom>
-        </p:spPr>
-      </p:pic>
-    </p:spTree>
-    <p:extLst>
-      <p:ext uri="{BB962C8B-B14F-4D97-AF65-F5344CB8AC3E}">
-        <p14:creationId xmlns:p14="http://schemas.microsoft.com/office/powerpoint/2010/main" val="364666111"/>
       </p:ext>
     </p:extLst>
   </p:cSld>
@@ -4152,10 +4590,10 @@
       </p:grpSpPr>
       <p:pic>
         <p:nvPicPr>
-          <p:cNvPr id="5" name="Picture 4">
-            <a:extLst>
-              <a:ext uri="{FF2B5EF4-FFF2-40B4-BE49-F238E27FC236}">
-                <a16:creationId xmlns:a16="http://schemas.microsoft.com/office/drawing/2014/main" id="{23BB00A9-1310-D9B9-58F6-53DD3161CC82}"/>
+          <p:cNvPr id="3" name="Picture 2">
+            <a:extLst>
+              <a:ext uri="{FF2B5EF4-FFF2-40B4-BE49-F238E27FC236}">
+                <a16:creationId xmlns:a16="http://schemas.microsoft.com/office/drawing/2014/main" id="{ED1329CF-4FFE-3C8F-CEDA-20CDC93C1AAC}"/>
               </a:ext>
             </a:extLst>
           </p:cNvPr>
@@ -4212,10 +4650,10 @@
       </p:grpSpPr>
       <p:pic>
         <p:nvPicPr>
-          <p:cNvPr id="5" name="Picture 4">
-            <a:extLst>
-              <a:ext uri="{FF2B5EF4-FFF2-40B4-BE49-F238E27FC236}">
-                <a16:creationId xmlns:a16="http://schemas.microsoft.com/office/drawing/2014/main" id="{90217EFF-CC06-CFB0-6736-E78C93AB3978}"/>
+          <p:cNvPr id="6" name="Picture 5">
+            <a:extLst>
+              <a:ext uri="{FF2B5EF4-FFF2-40B4-BE49-F238E27FC236}">
+                <a16:creationId xmlns:a16="http://schemas.microsoft.com/office/drawing/2014/main" id="{0CF22EDD-E03B-EE11-9794-97797719173D}"/>
               </a:ext>
             </a:extLst>
           </p:cNvPr>
@@ -4272,10 +4710,10 @@
       </p:grpSpPr>
       <p:pic>
         <p:nvPicPr>
-          <p:cNvPr id="5" name="Picture 4">
-            <a:extLst>
-              <a:ext uri="{FF2B5EF4-FFF2-40B4-BE49-F238E27FC236}">
-                <a16:creationId xmlns:a16="http://schemas.microsoft.com/office/drawing/2014/main" id="{84795C6E-DD28-241B-D4C3-C555E695F657}"/>
+          <p:cNvPr id="4" name="Picture 3">
+            <a:extLst>
+              <a:ext uri="{FF2B5EF4-FFF2-40B4-BE49-F238E27FC236}">
+                <a16:creationId xmlns:a16="http://schemas.microsoft.com/office/drawing/2014/main" id="{F533E226-7E6D-D630-5ACE-B83CCC733B34}"/>
               </a:ext>
             </a:extLst>
           </p:cNvPr>
@@ -4286,36 +4724,6 @@
         </p:nvPicPr>
         <p:blipFill>
           <a:blip r:embed="rId2"/>
-          <a:stretch>
-            <a:fillRect/>
-          </a:stretch>
-        </p:blipFill>
-        <p:spPr>
-          <a:xfrm>
-            <a:off x="0" y="431800"/>
-            <a:ext cx="12192000" cy="5994400"/>
-          </a:xfrm>
-          <a:prstGeom prst="rect">
-            <a:avLst/>
-          </a:prstGeom>
-        </p:spPr>
-      </p:pic>
-      <p:pic>
-        <p:nvPicPr>
-          <p:cNvPr id="3" name="Picture 2">
-            <a:extLst>
-              <a:ext uri="{FF2B5EF4-FFF2-40B4-BE49-F238E27FC236}">
-                <a16:creationId xmlns:a16="http://schemas.microsoft.com/office/drawing/2014/main" id="{3EFE962B-7112-2AEB-9DF7-54A235D3B9A2}"/>
-              </a:ext>
-            </a:extLst>
-          </p:cNvPr>
-          <p:cNvPicPr>
-            <a:picLocks noChangeAspect="1"/>
-          </p:cNvPicPr>
-          <p:nvPr/>
-        </p:nvPicPr>
-        <p:blipFill>
-          <a:blip r:embed="rId3"/>
           <a:stretch>
             <a:fillRect/>
           </a:stretch>

--- a/documents/Introduction.pptx
+++ b/documents/Introduction.pptx
@@ -25,6 +25,7 @@
     <p:sldId id="269" r:id="rId19"/>
     <p:sldId id="270" r:id="rId20"/>
     <p:sldId id="271" r:id="rId21"/>
+    <p:sldId id="276" r:id="rId22"/>
   </p:sldIdLst>
   <p:sldSz cx="12192000" cy="6858000"/>
   <p:notesSz cx="6858000" cy="9144000"/>
@@ -136,7 +137,7 @@
   <pc:docChgLst>
     <pc:chgData name="Vaughn Staples" userId="9a5933822faaa4bf" providerId="LiveId" clId="{BB914C8C-BCA1-484B-9A1F-EBF33ADB071F}"/>
     <pc:docChg chg="custSel addSld modSld">
-      <pc:chgData name="Vaughn Staples" userId="9a5933822faaa4bf" providerId="LiveId" clId="{BB914C8C-BCA1-484B-9A1F-EBF33ADB071F}" dt="2026-04-10T05:08:19.544" v="21" actId="22"/>
+      <pc:chgData name="Vaughn Staples" userId="9a5933822faaa4bf" providerId="LiveId" clId="{BB914C8C-BCA1-484B-9A1F-EBF33ADB071F}" dt="2026-04-14T08:44:57.138" v="23" actId="22"/>
       <pc:docMkLst>
         <pc:docMk/>
       </pc:docMkLst>
@@ -154,14 +155,6 @@
             <ac:picMk id="3" creationId="{ED1329CF-4FFE-3C8F-CEDA-20CDC93C1AAC}"/>
           </ac:picMkLst>
         </pc:picChg>
-        <pc:picChg chg="del">
-          <ac:chgData name="Vaughn Staples" userId="9a5933822faaa4bf" providerId="LiveId" clId="{BB914C8C-BCA1-484B-9A1F-EBF33ADB071F}" dt="2026-04-10T05:04:32.366" v="1" actId="478"/>
-          <ac:picMkLst>
-            <pc:docMk/>
-            <pc:sldMk cId="2810269388" sldId="262"/>
-            <ac:picMk id="5" creationId="{23BB00A9-1310-D9B9-58F6-53DD3161CC82}"/>
-          </ac:picMkLst>
-        </pc:picChg>
       </pc:sldChg>
       <pc:sldChg chg="addSp delSp mod">
         <pc:chgData name="Vaughn Staples" userId="9a5933822faaa4bf" providerId="LiveId" clId="{BB914C8C-BCA1-484B-9A1F-EBF33ADB071F}" dt="2026-04-10T05:05:56.158" v="8" actId="22"/>
@@ -169,22 +162,6 @@
           <pc:docMk/>
           <pc:sldMk cId="142702223" sldId="263"/>
         </pc:sldMkLst>
-        <pc:picChg chg="add del">
-          <ac:chgData name="Vaughn Staples" userId="9a5933822faaa4bf" providerId="LiveId" clId="{BB914C8C-BCA1-484B-9A1F-EBF33ADB071F}" dt="2026-04-10T05:05:41.730" v="7" actId="478"/>
-          <ac:picMkLst>
-            <pc:docMk/>
-            <pc:sldMk cId="142702223" sldId="263"/>
-            <ac:picMk id="3" creationId="{FFD69B28-11DB-6DB9-FB0C-F25DA0DB90D5}"/>
-          </ac:picMkLst>
-        </pc:picChg>
-        <pc:picChg chg="del">
-          <ac:chgData name="Vaughn Staples" userId="9a5933822faaa4bf" providerId="LiveId" clId="{BB914C8C-BCA1-484B-9A1F-EBF33ADB071F}" dt="2026-04-10T05:04:36.706" v="2" actId="478"/>
-          <ac:picMkLst>
-            <pc:docMk/>
-            <pc:sldMk cId="142702223" sldId="263"/>
-            <ac:picMk id="5" creationId="{90217EFF-CC06-CFB0-6736-E78C93AB3978}"/>
-          </ac:picMkLst>
-        </pc:picChg>
         <pc:picChg chg="add">
           <ac:chgData name="Vaughn Staples" userId="9a5933822faaa4bf" providerId="LiveId" clId="{BB914C8C-BCA1-484B-9A1F-EBF33ADB071F}" dt="2026-04-10T05:05:56.158" v="8" actId="22"/>
           <ac:picMkLst>
@@ -200,28 +177,12 @@
           <pc:docMk/>
           <pc:sldMk cId="2878559713" sldId="264"/>
         </pc:sldMkLst>
-        <pc:picChg chg="add del">
-          <ac:chgData name="Vaughn Staples" userId="9a5933822faaa4bf" providerId="LiveId" clId="{BB914C8C-BCA1-484B-9A1F-EBF33ADB071F}" dt="2026-04-10T05:04:38.850" v="3" actId="478"/>
-          <ac:picMkLst>
-            <pc:docMk/>
-            <pc:sldMk cId="2878559713" sldId="264"/>
-            <ac:picMk id="3" creationId="{3EFE962B-7112-2AEB-9DF7-54A235D3B9A2}"/>
-          </ac:picMkLst>
-        </pc:picChg>
         <pc:picChg chg="add">
           <ac:chgData name="Vaughn Staples" userId="9a5933822faaa4bf" providerId="LiveId" clId="{BB914C8C-BCA1-484B-9A1F-EBF33ADB071F}" dt="2026-04-10T05:06:25.809" v="9" actId="22"/>
           <ac:picMkLst>
             <pc:docMk/>
             <pc:sldMk cId="2878559713" sldId="264"/>
             <ac:picMk id="4" creationId="{F533E226-7E6D-D630-5ACE-B83CCC733B34}"/>
-          </ac:picMkLst>
-        </pc:picChg>
-        <pc:picChg chg="del">
-          <ac:chgData name="Vaughn Staples" userId="9a5933822faaa4bf" providerId="LiveId" clId="{BB914C8C-BCA1-484B-9A1F-EBF33ADB071F}" dt="2026-04-10T05:04:41.882" v="4" actId="478"/>
-          <ac:picMkLst>
-            <pc:docMk/>
-            <pc:sldMk cId="2878559713" sldId="264"/>
-            <ac:picMk id="5" creationId="{84795C6E-DD28-241B-D4C3-C555E695F657}"/>
           </ac:picMkLst>
         </pc:picChg>
       </pc:sldChg>
@@ -231,22 +192,6 @@
           <pc:docMk/>
           <pc:sldMk cId="4151877294" sldId="272"/>
         </pc:sldMkLst>
-        <pc:spChg chg="del">
-          <ac:chgData name="Vaughn Staples" userId="9a5933822faaa4bf" providerId="LiveId" clId="{BB914C8C-BCA1-484B-9A1F-EBF33ADB071F}" dt="2026-04-10T05:06:32.895" v="11" actId="478"/>
-          <ac:spMkLst>
-            <pc:docMk/>
-            <pc:sldMk cId="4151877294" sldId="272"/>
-            <ac:spMk id="2" creationId="{6ABF9F45-B082-56E9-5AB8-3DA401B715EA}"/>
-          </ac:spMkLst>
-        </pc:spChg>
-        <pc:spChg chg="del">
-          <ac:chgData name="Vaughn Staples" userId="9a5933822faaa4bf" providerId="LiveId" clId="{BB914C8C-BCA1-484B-9A1F-EBF33ADB071F}" dt="2026-04-10T05:06:32.895" v="11" actId="478"/>
-          <ac:spMkLst>
-            <pc:docMk/>
-            <pc:sldMk cId="4151877294" sldId="272"/>
-            <ac:spMk id="3" creationId="{6CE2C0AA-DE65-29E7-CA27-5219EB421E7E}"/>
-          </ac:spMkLst>
-        </pc:spChg>
         <pc:picChg chg="add">
           <ac:chgData name="Vaughn Staples" userId="9a5933822faaa4bf" providerId="LiveId" clId="{BB914C8C-BCA1-484B-9A1F-EBF33ADB071F}" dt="2026-04-10T05:06:58.152" v="12" actId="22"/>
           <ac:picMkLst>
@@ -262,22 +207,6 @@
           <pc:docMk/>
           <pc:sldMk cId="1866357744" sldId="273"/>
         </pc:sldMkLst>
-        <pc:spChg chg="del">
-          <ac:chgData name="Vaughn Staples" userId="9a5933822faaa4bf" providerId="LiveId" clId="{BB914C8C-BCA1-484B-9A1F-EBF33ADB071F}" dt="2026-04-10T05:07:20.619" v="14" actId="478"/>
-          <ac:spMkLst>
-            <pc:docMk/>
-            <pc:sldMk cId="1866357744" sldId="273"/>
-            <ac:spMk id="2" creationId="{B9691869-FEEB-F3B6-FB4F-ED5AAB4EDCE4}"/>
-          </ac:spMkLst>
-        </pc:spChg>
-        <pc:spChg chg="del">
-          <ac:chgData name="Vaughn Staples" userId="9a5933822faaa4bf" providerId="LiveId" clId="{BB914C8C-BCA1-484B-9A1F-EBF33ADB071F}" dt="2026-04-10T05:07:20.619" v="14" actId="478"/>
-          <ac:spMkLst>
-            <pc:docMk/>
-            <pc:sldMk cId="1866357744" sldId="273"/>
-            <ac:spMk id="3" creationId="{3B8A60E9-8A63-4A06-6065-2A341610CAE7}"/>
-          </ac:spMkLst>
-        </pc:spChg>
         <pc:picChg chg="add">
           <ac:chgData name="Vaughn Staples" userId="9a5933822faaa4bf" providerId="LiveId" clId="{BB914C8C-BCA1-484B-9A1F-EBF33ADB071F}" dt="2026-04-10T05:07:21.824" v="15" actId="22"/>
           <ac:picMkLst>
@@ -293,22 +222,6 @@
           <pc:docMk/>
           <pc:sldMk cId="539954587" sldId="274"/>
         </pc:sldMkLst>
-        <pc:spChg chg="del">
-          <ac:chgData name="Vaughn Staples" userId="9a5933822faaa4bf" providerId="LiveId" clId="{BB914C8C-BCA1-484B-9A1F-EBF33ADB071F}" dt="2026-04-10T05:08:03.654" v="17" actId="478"/>
-          <ac:spMkLst>
-            <pc:docMk/>
-            <pc:sldMk cId="539954587" sldId="274"/>
-            <ac:spMk id="2" creationId="{0EF496BB-9D10-4DEA-4D51-69B22C431615}"/>
-          </ac:spMkLst>
-        </pc:spChg>
-        <pc:spChg chg="del">
-          <ac:chgData name="Vaughn Staples" userId="9a5933822faaa4bf" providerId="LiveId" clId="{BB914C8C-BCA1-484B-9A1F-EBF33ADB071F}" dt="2026-04-10T05:08:03.654" v="17" actId="478"/>
-          <ac:spMkLst>
-            <pc:docMk/>
-            <pc:sldMk cId="539954587" sldId="274"/>
-            <ac:spMk id="3" creationId="{597DB1DC-6185-3550-96E2-A40CC1BA5AD1}"/>
-          </ac:spMkLst>
-        </pc:spChg>
         <pc:picChg chg="add">
           <ac:chgData name="Vaughn Staples" userId="9a5933822faaa4bf" providerId="LiveId" clId="{BB914C8C-BCA1-484B-9A1F-EBF33ADB071F}" dt="2026-04-10T05:08:04.851" v="18" actId="22"/>
           <ac:picMkLst>
@@ -324,28 +237,27 @@
           <pc:docMk/>
           <pc:sldMk cId="2248252599" sldId="275"/>
         </pc:sldMkLst>
-        <pc:spChg chg="del">
-          <ac:chgData name="Vaughn Staples" userId="9a5933822faaa4bf" providerId="LiveId" clId="{BB914C8C-BCA1-484B-9A1F-EBF33ADB071F}" dt="2026-04-10T05:08:12.534" v="20" actId="478"/>
-          <ac:spMkLst>
-            <pc:docMk/>
-            <pc:sldMk cId="2248252599" sldId="275"/>
-            <ac:spMk id="2" creationId="{31BFB366-E348-7E7F-8458-D1DE898B3CAE}"/>
-          </ac:spMkLst>
-        </pc:spChg>
-        <pc:spChg chg="del">
-          <ac:chgData name="Vaughn Staples" userId="9a5933822faaa4bf" providerId="LiveId" clId="{BB914C8C-BCA1-484B-9A1F-EBF33ADB071F}" dt="2026-04-10T05:08:12.534" v="20" actId="478"/>
-          <ac:spMkLst>
-            <pc:docMk/>
-            <pc:sldMk cId="2248252599" sldId="275"/>
-            <ac:spMk id="3" creationId="{F34D9536-2147-60D5-523C-81B470388CBA}"/>
-          </ac:spMkLst>
-        </pc:spChg>
         <pc:picChg chg="add">
           <ac:chgData name="Vaughn Staples" userId="9a5933822faaa4bf" providerId="LiveId" clId="{BB914C8C-BCA1-484B-9A1F-EBF33ADB071F}" dt="2026-04-10T05:08:19.544" v="21" actId="22"/>
           <ac:picMkLst>
             <pc:docMk/>
             <pc:sldMk cId="2248252599" sldId="275"/>
             <ac:picMk id="5" creationId="{FFA88C58-DFD7-5EFA-AFBC-D5D7C127CCB8}"/>
+          </ac:picMkLst>
+        </pc:picChg>
+      </pc:sldChg>
+      <pc:sldChg chg="addSp new mod">
+        <pc:chgData name="Vaughn Staples" userId="9a5933822faaa4bf" providerId="LiveId" clId="{BB914C8C-BCA1-484B-9A1F-EBF33ADB071F}" dt="2026-04-14T08:44:57.138" v="23" actId="22"/>
+        <pc:sldMkLst>
+          <pc:docMk/>
+          <pc:sldMk cId="3372478806" sldId="276"/>
+        </pc:sldMkLst>
+        <pc:picChg chg="add">
+          <ac:chgData name="Vaughn Staples" userId="9a5933822faaa4bf" providerId="LiveId" clId="{BB914C8C-BCA1-484B-9A1F-EBF33ADB071F}" dt="2026-04-14T08:44:57.138" v="23" actId="22"/>
+          <ac:picMkLst>
+            <pc:docMk/>
+            <pc:sldMk cId="3372478806" sldId="276"/>
+            <ac:picMk id="5" creationId="{44403891-F23A-3FDD-4ACE-7CF67A0BD267}"/>
           </ac:picMkLst>
         </pc:picChg>
       </pc:sldChg>
@@ -501,7 +413,7 @@
           <a:p>
             <a:fld id="{39DFAE05-33A5-42B2-8B0E-BC60315FEFBC}" type="datetimeFigureOut">
               <a:rPr lang="en-US" smtClean="0"/>
-              <a:t>4/10/2026</a:t>
+              <a:t>4/14/2026</a:t>
             </a:fld>
             <a:endParaRPr lang="en-US"/>
           </a:p>
@@ -699,7 +611,7 @@
           <a:p>
             <a:fld id="{39DFAE05-33A5-42B2-8B0E-BC60315FEFBC}" type="datetimeFigureOut">
               <a:rPr lang="en-US" smtClean="0"/>
-              <a:t>4/10/2026</a:t>
+              <a:t>4/14/2026</a:t>
             </a:fld>
             <a:endParaRPr lang="en-US"/>
           </a:p>
@@ -907,7 +819,7 @@
           <a:p>
             <a:fld id="{39DFAE05-33A5-42B2-8B0E-BC60315FEFBC}" type="datetimeFigureOut">
               <a:rPr lang="en-US" smtClean="0"/>
-              <a:t>4/10/2026</a:t>
+              <a:t>4/14/2026</a:t>
             </a:fld>
             <a:endParaRPr lang="en-US"/>
           </a:p>
@@ -1105,7 +1017,7 @@
           <a:p>
             <a:fld id="{39DFAE05-33A5-42B2-8B0E-BC60315FEFBC}" type="datetimeFigureOut">
               <a:rPr lang="en-US" smtClean="0"/>
-              <a:t>4/10/2026</a:t>
+              <a:t>4/14/2026</a:t>
             </a:fld>
             <a:endParaRPr lang="en-US"/>
           </a:p>
@@ -1380,7 +1292,7 @@
           <a:p>
             <a:fld id="{39DFAE05-33A5-42B2-8B0E-BC60315FEFBC}" type="datetimeFigureOut">
               <a:rPr lang="en-US" smtClean="0"/>
-              <a:t>4/10/2026</a:t>
+              <a:t>4/14/2026</a:t>
             </a:fld>
             <a:endParaRPr lang="en-US"/>
           </a:p>
@@ -1645,7 +1557,7 @@
           <a:p>
             <a:fld id="{39DFAE05-33A5-42B2-8B0E-BC60315FEFBC}" type="datetimeFigureOut">
               <a:rPr lang="en-US" smtClean="0"/>
-              <a:t>4/10/2026</a:t>
+              <a:t>4/14/2026</a:t>
             </a:fld>
             <a:endParaRPr lang="en-US"/>
           </a:p>
@@ -2057,7 +1969,7 @@
           <a:p>
             <a:fld id="{39DFAE05-33A5-42B2-8B0E-BC60315FEFBC}" type="datetimeFigureOut">
               <a:rPr lang="en-US" smtClean="0"/>
-              <a:t>4/10/2026</a:t>
+              <a:t>4/14/2026</a:t>
             </a:fld>
             <a:endParaRPr lang="en-US"/>
           </a:p>
@@ -2198,7 +2110,7 @@
           <a:p>
             <a:fld id="{39DFAE05-33A5-42B2-8B0E-BC60315FEFBC}" type="datetimeFigureOut">
               <a:rPr lang="en-US" smtClean="0"/>
-              <a:t>4/10/2026</a:t>
+              <a:t>4/14/2026</a:t>
             </a:fld>
             <a:endParaRPr lang="en-US"/>
           </a:p>
@@ -2311,7 +2223,7 @@
           <a:p>
             <a:fld id="{39DFAE05-33A5-42B2-8B0E-BC60315FEFBC}" type="datetimeFigureOut">
               <a:rPr lang="en-US" smtClean="0"/>
-              <a:t>4/10/2026</a:t>
+              <a:t>4/14/2026</a:t>
             </a:fld>
             <a:endParaRPr lang="en-US"/>
           </a:p>
@@ -2622,7 +2534,7 @@
           <a:p>
             <a:fld id="{39DFAE05-33A5-42B2-8B0E-BC60315FEFBC}" type="datetimeFigureOut">
               <a:rPr lang="en-US" smtClean="0"/>
-              <a:t>4/10/2026</a:t>
+              <a:t>4/14/2026</a:t>
             </a:fld>
             <a:endParaRPr lang="en-US"/>
           </a:p>
@@ -2910,7 +2822,7 @@
           <a:p>
             <a:fld id="{39DFAE05-33A5-42B2-8B0E-BC60315FEFBC}" type="datetimeFigureOut">
               <a:rPr lang="en-US" smtClean="0"/>
-              <a:t>4/10/2026</a:t>
+              <a:t>4/14/2026</a:t>
             </a:fld>
             <a:endParaRPr lang="en-US"/>
           </a:p>
@@ -3151,7 +3063,7 @@
           <a:p>
             <a:fld id="{39DFAE05-33A5-42B2-8B0E-BC60315FEFBC}" type="datetimeFigureOut">
               <a:rPr lang="en-US" smtClean="0"/>
-              <a:t>4/10/2026</a:t>
+              <a:t>4/14/2026</a:t>
             </a:fld>
             <a:endParaRPr lang="en-US"/>
           </a:p>
@@ -4322,6 +4234,116 @@
     <p:extLst>
       <p:ext uri="{BB962C8B-B14F-4D97-AF65-F5344CB8AC3E}">
         <p14:creationId xmlns:p14="http://schemas.microsoft.com/office/powerpoint/2010/main" val="3217210439"/>
+      </p:ext>
+    </p:extLst>
+  </p:cSld>
+  <p:clrMapOvr>
+    <a:masterClrMapping/>
+  </p:clrMapOvr>
+</p:sld>
+</file>
+
+<file path=ppt/slides/slide21.xml><?xml version="1.0" encoding="utf-8"?>
+<p:sld xmlns:a="http://schemas.openxmlformats.org/drawingml/2006/main" xmlns:r="http://schemas.openxmlformats.org/officeDocument/2006/relationships" xmlns:p="http://schemas.openxmlformats.org/presentationml/2006/main">
+  <p:cSld>
+    <p:spTree>
+      <p:nvGrpSpPr>
+        <p:cNvPr id="1" name=""/>
+        <p:cNvGrpSpPr/>
+        <p:nvPr/>
+      </p:nvGrpSpPr>
+      <p:grpSpPr>
+        <a:xfrm>
+          <a:off x="0" y="0"/>
+          <a:ext cx="0" cy="0"/>
+          <a:chOff x="0" y="0"/>
+          <a:chExt cx="0" cy="0"/>
+        </a:xfrm>
+      </p:grpSpPr>
+      <p:sp>
+        <p:nvSpPr>
+          <p:cNvPr id="2" name="Title 1">
+            <a:extLst>
+              <a:ext uri="{FF2B5EF4-FFF2-40B4-BE49-F238E27FC236}">
+                <a16:creationId xmlns:a16="http://schemas.microsoft.com/office/drawing/2014/main" id="{B9D39C31-9821-FC6E-8C28-40DAA53D89C0}"/>
+              </a:ext>
+            </a:extLst>
+          </p:cNvPr>
+          <p:cNvSpPr>
+            <a:spLocks noGrp="1"/>
+          </p:cNvSpPr>
+          <p:nvPr>
+            <p:ph type="title"/>
+          </p:nvPr>
+        </p:nvSpPr>
+        <p:spPr/>
+        <p:txBody>
+          <a:bodyPr/>
+          <a:lstStyle/>
+          <a:p>
+            <a:endParaRPr lang="en-US"/>
+          </a:p>
+        </p:txBody>
+      </p:sp>
+      <p:sp>
+        <p:nvSpPr>
+          <p:cNvPr id="3" name="Content Placeholder 2">
+            <a:extLst>
+              <a:ext uri="{FF2B5EF4-FFF2-40B4-BE49-F238E27FC236}">
+                <a16:creationId xmlns:a16="http://schemas.microsoft.com/office/drawing/2014/main" id="{AA51F82C-EDAD-3551-3F35-D4A750069600}"/>
+              </a:ext>
+            </a:extLst>
+          </p:cNvPr>
+          <p:cNvSpPr>
+            <a:spLocks noGrp="1"/>
+          </p:cNvSpPr>
+          <p:nvPr>
+            <p:ph idx="1"/>
+          </p:nvPr>
+        </p:nvSpPr>
+        <p:spPr/>
+        <p:txBody>
+          <a:bodyPr/>
+          <a:lstStyle/>
+          <a:p>
+            <a:endParaRPr lang="en-US"/>
+          </a:p>
+        </p:txBody>
+      </p:sp>
+      <p:pic>
+        <p:nvPicPr>
+          <p:cNvPr id="5" name="Picture 4">
+            <a:extLst>
+              <a:ext uri="{FF2B5EF4-FFF2-40B4-BE49-F238E27FC236}">
+                <a16:creationId xmlns:a16="http://schemas.microsoft.com/office/drawing/2014/main" id="{44403891-F23A-3FDD-4ACE-7CF67A0BD267}"/>
+              </a:ext>
+            </a:extLst>
+          </p:cNvPr>
+          <p:cNvPicPr>
+            <a:picLocks noChangeAspect="1"/>
+          </p:cNvPicPr>
+          <p:nvPr/>
+        </p:nvPicPr>
+        <p:blipFill>
+          <a:blip r:embed="rId2"/>
+          <a:stretch>
+            <a:fillRect/>
+          </a:stretch>
+        </p:blipFill>
+        <p:spPr>
+          <a:xfrm>
+            <a:off x="0" y="155575"/>
+            <a:ext cx="12192000" cy="6546850"/>
+          </a:xfrm>
+          <a:prstGeom prst="rect">
+            <a:avLst/>
+          </a:prstGeom>
+        </p:spPr>
+      </p:pic>
+    </p:spTree>
+    <p:extLst>
+      <p:ext uri="{BB962C8B-B14F-4D97-AF65-F5344CB8AC3E}">
+        <p14:creationId xmlns:p14="http://schemas.microsoft.com/office/powerpoint/2010/main" val="3372478806"/>
       </p:ext>
     </p:extLst>
   </p:cSld>

--- a/documents/Introduction.pptx
+++ b/documents/Introduction.pptx
@@ -132,21 +132,127 @@
 </p:presentation>
 </file>
 
+<file path=ppt/revisionInfo.xml><?xml version="1.0" encoding="utf-8"?>
+<p1510:revInfo xmlns:a="http://schemas.openxmlformats.org/drawingml/2006/main" xmlns:r="http://schemas.openxmlformats.org/officeDocument/2006/relationships" xmlns:p1510="http://schemas.microsoft.com/office/powerpoint/2015/10/main">
+  <p1510:revLst>
+    <p1510:client id="{531A6823-4C57-4D97-91C6-2D99567E83A8}" v="23" dt="2026-04-17T20:00:58.724"/>
+  </p1510:revLst>
+</p1510:revInfo>
+</file>
+
 <file path=ppt/changesInfos/changesInfo1.xml><?xml version="1.0" encoding="utf-8"?>
 <pc:chgInfo xmlns:a="http://schemas.openxmlformats.org/drawingml/2006/main" xmlns:r="http://schemas.openxmlformats.org/officeDocument/2006/relationships" xmlns:ac="http://schemas.microsoft.com/office/drawing/2013/main/command" xmlns:pc="http://schemas.microsoft.com/office/powerpoint/2013/main/command">
   <pc:docChgLst>
     <pc:chgData name="Vaughn Staples" userId="9a5933822faaa4bf" providerId="LiveId" clId="{BB914C8C-BCA1-484B-9A1F-EBF33ADB071F}"/>
     <pc:docChg chg="custSel addSld modSld">
-      <pc:chgData name="Vaughn Staples" userId="9a5933822faaa4bf" providerId="LiveId" clId="{BB914C8C-BCA1-484B-9A1F-EBF33ADB071F}" dt="2026-04-14T08:44:57.138" v="23" actId="22"/>
+      <pc:chgData name="Vaughn Staples" userId="9a5933822faaa4bf" providerId="LiveId" clId="{BB914C8C-BCA1-484B-9A1F-EBF33ADB071F}" dt="2026-04-17T20:01:10.532" v="465" actId="20577"/>
       <pc:docMkLst>
         <pc:docMk/>
       </pc:docMkLst>
-      <pc:sldChg chg="addSp delSp mod">
-        <pc:chgData name="Vaughn Staples" userId="9a5933822faaa4bf" providerId="LiveId" clId="{BB914C8C-BCA1-484B-9A1F-EBF33ADB071F}" dt="2026-04-10T05:05:12.821" v="5" actId="22"/>
+      <pc:sldChg chg="addSp modSp mod">
+        <pc:chgData name="Vaughn Staples" userId="9a5933822faaa4bf" providerId="LiveId" clId="{BB914C8C-BCA1-484B-9A1F-EBF33ADB071F}" dt="2026-04-17T19:52:36.892" v="106" actId="207"/>
+        <pc:sldMkLst>
+          <pc:docMk/>
+          <pc:sldMk cId="1303823658" sldId="256"/>
+        </pc:sldMkLst>
+        <pc:spChg chg="add mod">
+          <ac:chgData name="Vaughn Staples" userId="9a5933822faaa4bf" providerId="LiveId" clId="{BB914C8C-BCA1-484B-9A1F-EBF33ADB071F}" dt="2026-04-17T19:52:36.892" v="106" actId="207"/>
+          <ac:spMkLst>
+            <pc:docMk/>
+            <pc:sldMk cId="1303823658" sldId="256"/>
+            <ac:spMk id="2" creationId="{BD7F26B6-5FAE-3204-138C-61DB43C1B430}"/>
+          </ac:spMkLst>
+        </pc:spChg>
+      </pc:sldChg>
+      <pc:sldChg chg="addSp modSp mod">
+        <pc:chgData name="Vaughn Staples" userId="9a5933822faaa4bf" providerId="LiveId" clId="{BB914C8C-BCA1-484B-9A1F-EBF33ADB071F}" dt="2026-04-17T19:52:33.760" v="105" actId="207"/>
+        <pc:sldMkLst>
+          <pc:docMk/>
+          <pc:sldMk cId="364666111" sldId="257"/>
+        </pc:sldMkLst>
+        <pc:spChg chg="add mod">
+          <ac:chgData name="Vaughn Staples" userId="9a5933822faaa4bf" providerId="LiveId" clId="{BB914C8C-BCA1-484B-9A1F-EBF33ADB071F}" dt="2026-04-17T19:52:33.760" v="105" actId="207"/>
+          <ac:spMkLst>
+            <pc:docMk/>
+            <pc:sldMk cId="364666111" sldId="257"/>
+            <ac:spMk id="2" creationId="{BE0E9318-B302-163B-52D7-7924D230E411}"/>
+          </ac:spMkLst>
+        </pc:spChg>
+      </pc:sldChg>
+      <pc:sldChg chg="addSp modSp mod">
+        <pc:chgData name="Vaughn Staples" userId="9a5933822faaa4bf" providerId="LiveId" clId="{BB914C8C-BCA1-484B-9A1F-EBF33ADB071F}" dt="2026-04-17T19:52:29.892" v="104" actId="207"/>
+        <pc:sldMkLst>
+          <pc:docMk/>
+          <pc:sldMk cId="3349118182" sldId="258"/>
+        </pc:sldMkLst>
+        <pc:spChg chg="add mod">
+          <ac:chgData name="Vaughn Staples" userId="9a5933822faaa4bf" providerId="LiveId" clId="{BB914C8C-BCA1-484B-9A1F-EBF33ADB071F}" dt="2026-04-17T19:52:29.892" v="104" actId="207"/>
+          <ac:spMkLst>
+            <pc:docMk/>
+            <pc:sldMk cId="3349118182" sldId="258"/>
+            <ac:spMk id="2" creationId="{A163B0F2-19F9-B1A1-BB11-84D69C8ADF24}"/>
+          </ac:spMkLst>
+        </pc:spChg>
+      </pc:sldChg>
+      <pc:sldChg chg="addSp modSp mod">
+        <pc:chgData name="Vaughn Staples" userId="9a5933822faaa4bf" providerId="LiveId" clId="{BB914C8C-BCA1-484B-9A1F-EBF33ADB071F}" dt="2026-04-17T19:52:53.509" v="116" actId="207"/>
+        <pc:sldMkLst>
+          <pc:docMk/>
+          <pc:sldMk cId="2125514985" sldId="259"/>
+        </pc:sldMkLst>
+        <pc:spChg chg="add mod">
+          <ac:chgData name="Vaughn Staples" userId="9a5933822faaa4bf" providerId="LiveId" clId="{BB914C8C-BCA1-484B-9A1F-EBF33ADB071F}" dt="2026-04-17T19:52:53.509" v="116" actId="207"/>
+          <ac:spMkLst>
+            <pc:docMk/>
+            <pc:sldMk cId="2125514985" sldId="259"/>
+            <ac:spMk id="2" creationId="{BC5981F0-A937-5E54-94CB-5CB3B5A8438A}"/>
+          </ac:spMkLst>
+        </pc:spChg>
+      </pc:sldChg>
+      <pc:sldChg chg="addSp modSp mod">
+        <pc:chgData name="Vaughn Staples" userId="9a5933822faaa4bf" providerId="LiveId" clId="{BB914C8C-BCA1-484B-9A1F-EBF33ADB071F}" dt="2026-04-17T19:53:13.075" v="139" actId="207"/>
+        <pc:sldMkLst>
+          <pc:docMk/>
+          <pc:sldMk cId="876860813" sldId="260"/>
+        </pc:sldMkLst>
+        <pc:spChg chg="add mod">
+          <ac:chgData name="Vaughn Staples" userId="9a5933822faaa4bf" providerId="LiveId" clId="{BB914C8C-BCA1-484B-9A1F-EBF33ADB071F}" dt="2026-04-17T19:53:13.075" v="139" actId="207"/>
+          <ac:spMkLst>
+            <pc:docMk/>
+            <pc:sldMk cId="876860813" sldId="260"/>
+            <ac:spMk id="2" creationId="{81B69475-BD0F-AC17-91ED-2339A9771EB1}"/>
+          </ac:spMkLst>
+        </pc:spChg>
+      </pc:sldChg>
+      <pc:sldChg chg="addSp modSp mod">
+        <pc:chgData name="Vaughn Staples" userId="9a5933822faaa4bf" providerId="LiveId" clId="{BB914C8C-BCA1-484B-9A1F-EBF33ADB071F}" dt="2026-04-17T19:53:28.491" v="149" actId="207"/>
+        <pc:sldMkLst>
+          <pc:docMk/>
+          <pc:sldMk cId="806142707" sldId="261"/>
+        </pc:sldMkLst>
+        <pc:spChg chg="add mod">
+          <ac:chgData name="Vaughn Staples" userId="9a5933822faaa4bf" providerId="LiveId" clId="{BB914C8C-BCA1-484B-9A1F-EBF33ADB071F}" dt="2026-04-17T19:53:28.491" v="149" actId="207"/>
+          <ac:spMkLst>
+            <pc:docMk/>
+            <pc:sldMk cId="806142707" sldId="261"/>
+            <ac:spMk id="2" creationId="{70037263-54B8-CE12-3303-9E0251ABA412}"/>
+          </ac:spMkLst>
+        </pc:spChg>
+      </pc:sldChg>
+      <pc:sldChg chg="addSp delSp modSp mod">
+        <pc:chgData name="Vaughn Staples" userId="9a5933822faaa4bf" providerId="LiveId" clId="{BB914C8C-BCA1-484B-9A1F-EBF33ADB071F}" dt="2026-04-17T19:53:44.301" v="168" actId="207"/>
         <pc:sldMkLst>
           <pc:docMk/>
           <pc:sldMk cId="2810269388" sldId="262"/>
         </pc:sldMkLst>
+        <pc:spChg chg="add mod">
+          <ac:chgData name="Vaughn Staples" userId="9a5933822faaa4bf" providerId="LiveId" clId="{BB914C8C-BCA1-484B-9A1F-EBF33ADB071F}" dt="2026-04-17T19:53:44.301" v="168" actId="207"/>
+          <ac:spMkLst>
+            <pc:docMk/>
+            <pc:sldMk cId="2810269388" sldId="262"/>
+            <ac:spMk id="2" creationId="{5B260834-C155-5894-3C4A-81E1F0EC27DD}"/>
+          </ac:spMkLst>
+        </pc:spChg>
         <pc:picChg chg="add">
           <ac:chgData name="Vaughn Staples" userId="9a5933822faaa4bf" providerId="LiveId" clId="{BB914C8C-BCA1-484B-9A1F-EBF33ADB071F}" dt="2026-04-10T05:05:12.821" v="5" actId="22"/>
           <ac:picMkLst>
@@ -156,12 +262,20 @@
           </ac:picMkLst>
         </pc:picChg>
       </pc:sldChg>
-      <pc:sldChg chg="addSp delSp mod">
-        <pc:chgData name="Vaughn Staples" userId="9a5933822faaa4bf" providerId="LiveId" clId="{BB914C8C-BCA1-484B-9A1F-EBF33ADB071F}" dt="2026-04-10T05:05:56.158" v="8" actId="22"/>
+      <pc:sldChg chg="addSp delSp modSp mod">
+        <pc:chgData name="Vaughn Staples" userId="9a5933822faaa4bf" providerId="LiveId" clId="{BB914C8C-BCA1-484B-9A1F-EBF33ADB071F}" dt="2026-04-17T19:56:45.447" v="188" actId="20577"/>
         <pc:sldMkLst>
           <pc:docMk/>
           <pc:sldMk cId="142702223" sldId="263"/>
         </pc:sldMkLst>
+        <pc:spChg chg="add mod">
+          <ac:chgData name="Vaughn Staples" userId="9a5933822faaa4bf" providerId="LiveId" clId="{BB914C8C-BCA1-484B-9A1F-EBF33ADB071F}" dt="2026-04-17T19:56:45.447" v="188" actId="20577"/>
+          <ac:spMkLst>
+            <pc:docMk/>
+            <pc:sldMk cId="142702223" sldId="263"/>
+            <ac:spMk id="2" creationId="{75D90D01-8709-2FF6-0F53-2E267457BD08}"/>
+          </ac:spMkLst>
+        </pc:spChg>
         <pc:picChg chg="add">
           <ac:chgData name="Vaughn Staples" userId="9a5933822faaa4bf" providerId="LiveId" clId="{BB914C8C-BCA1-484B-9A1F-EBF33ADB071F}" dt="2026-04-10T05:05:56.158" v="8" actId="22"/>
           <ac:picMkLst>
@@ -171,12 +285,20 @@
           </ac:picMkLst>
         </pc:picChg>
       </pc:sldChg>
-      <pc:sldChg chg="addSp delSp mod">
-        <pc:chgData name="Vaughn Staples" userId="9a5933822faaa4bf" providerId="LiveId" clId="{BB914C8C-BCA1-484B-9A1F-EBF33ADB071F}" dt="2026-04-10T05:06:25.809" v="9" actId="22"/>
+      <pc:sldChg chg="addSp delSp modSp mod">
+        <pc:chgData name="Vaughn Staples" userId="9a5933822faaa4bf" providerId="LiveId" clId="{BB914C8C-BCA1-484B-9A1F-EBF33ADB071F}" dt="2026-04-17T19:56:56.410" v="201" actId="20577"/>
         <pc:sldMkLst>
           <pc:docMk/>
           <pc:sldMk cId="2878559713" sldId="264"/>
         </pc:sldMkLst>
+        <pc:spChg chg="add mod">
+          <ac:chgData name="Vaughn Staples" userId="9a5933822faaa4bf" providerId="LiveId" clId="{BB914C8C-BCA1-484B-9A1F-EBF33ADB071F}" dt="2026-04-17T19:56:56.410" v="201" actId="20577"/>
+          <ac:spMkLst>
+            <pc:docMk/>
+            <pc:sldMk cId="2878559713" sldId="264"/>
+            <ac:spMk id="2" creationId="{A2AC526B-CE70-7B58-8C8F-3528B9A2AC05}"/>
+          </ac:spMkLst>
+        </pc:spChg>
         <pc:picChg chg="add">
           <ac:chgData name="Vaughn Staples" userId="9a5933822faaa4bf" providerId="LiveId" clId="{BB914C8C-BCA1-484B-9A1F-EBF33ADB071F}" dt="2026-04-10T05:06:25.809" v="9" actId="22"/>
           <ac:picMkLst>
@@ -186,12 +308,133 @@
           </ac:picMkLst>
         </pc:picChg>
       </pc:sldChg>
-      <pc:sldChg chg="addSp delSp new mod">
-        <pc:chgData name="Vaughn Staples" userId="9a5933822faaa4bf" providerId="LiveId" clId="{BB914C8C-BCA1-484B-9A1F-EBF33ADB071F}" dt="2026-04-10T05:06:58.152" v="12" actId="22"/>
+      <pc:sldChg chg="addSp modSp mod">
+        <pc:chgData name="Vaughn Staples" userId="9a5933822faaa4bf" providerId="LiveId" clId="{BB914C8C-BCA1-484B-9A1F-EBF33ADB071F}" dt="2026-04-17T19:58:36.408" v="307" actId="20577"/>
+        <pc:sldMkLst>
+          <pc:docMk/>
+          <pc:sldMk cId="1065960390" sldId="265"/>
+        </pc:sldMkLst>
+        <pc:spChg chg="add mod">
+          <ac:chgData name="Vaughn Staples" userId="9a5933822faaa4bf" providerId="LiveId" clId="{BB914C8C-BCA1-484B-9A1F-EBF33ADB071F}" dt="2026-04-17T19:58:36.408" v="307" actId="20577"/>
+          <ac:spMkLst>
+            <pc:docMk/>
+            <pc:sldMk cId="1065960390" sldId="265"/>
+            <ac:spMk id="2" creationId="{A7E94B87-E082-30CF-543A-1D4E88C0001F}"/>
+          </ac:spMkLst>
+        </pc:spChg>
+      </pc:sldChg>
+      <pc:sldChg chg="addSp modSp mod">
+        <pc:chgData name="Vaughn Staples" userId="9a5933822faaa4bf" providerId="LiveId" clId="{BB914C8C-BCA1-484B-9A1F-EBF33ADB071F}" dt="2026-04-17T19:58:51.677" v="319" actId="20577"/>
+        <pc:sldMkLst>
+          <pc:docMk/>
+          <pc:sldMk cId="924131761" sldId="266"/>
+        </pc:sldMkLst>
+        <pc:spChg chg="add mod">
+          <ac:chgData name="Vaughn Staples" userId="9a5933822faaa4bf" providerId="LiveId" clId="{BB914C8C-BCA1-484B-9A1F-EBF33ADB071F}" dt="2026-04-17T19:58:37.955" v="308"/>
+          <ac:spMkLst>
+            <pc:docMk/>
+            <pc:sldMk cId="924131761" sldId="266"/>
+            <ac:spMk id="2" creationId="{E7012BF7-3E49-273B-0500-E839DC0CF457}"/>
+          </ac:spMkLst>
+        </pc:spChg>
+        <pc:spChg chg="add mod">
+          <ac:chgData name="Vaughn Staples" userId="9a5933822faaa4bf" providerId="LiveId" clId="{BB914C8C-BCA1-484B-9A1F-EBF33ADB071F}" dt="2026-04-17T19:58:51.677" v="319" actId="20577"/>
+          <ac:spMkLst>
+            <pc:docMk/>
+            <pc:sldMk cId="924131761" sldId="266"/>
+            <ac:spMk id="3" creationId="{980CE395-65D0-210F-2A84-04F11CA26843}"/>
+          </ac:spMkLst>
+        </pc:spChg>
+      </pc:sldChg>
+      <pc:sldChg chg="addSp modSp mod">
+        <pc:chgData name="Vaughn Staples" userId="9a5933822faaa4bf" providerId="LiveId" clId="{BB914C8C-BCA1-484B-9A1F-EBF33ADB071F}" dt="2026-04-17T19:59:11.582" v="350" actId="20577"/>
+        <pc:sldMkLst>
+          <pc:docMk/>
+          <pc:sldMk cId="1840141321" sldId="267"/>
+        </pc:sldMkLst>
+        <pc:spChg chg="add mod">
+          <ac:chgData name="Vaughn Staples" userId="9a5933822faaa4bf" providerId="LiveId" clId="{BB914C8C-BCA1-484B-9A1F-EBF33ADB071F}" dt="2026-04-17T19:59:11.582" v="350" actId="20577"/>
+          <ac:spMkLst>
+            <pc:docMk/>
+            <pc:sldMk cId="1840141321" sldId="267"/>
+            <ac:spMk id="2" creationId="{B446DA73-7280-77A6-D38A-318EF95C6F96}"/>
+          </ac:spMkLst>
+        </pc:spChg>
+      </pc:sldChg>
+      <pc:sldChg chg="addSp modSp mod">
+        <pc:chgData name="Vaughn Staples" userId="9a5933822faaa4bf" providerId="LiveId" clId="{BB914C8C-BCA1-484B-9A1F-EBF33ADB071F}" dt="2026-04-17T19:59:30.726" v="378" actId="20577"/>
+        <pc:sldMkLst>
+          <pc:docMk/>
+          <pc:sldMk cId="2191888532" sldId="268"/>
+        </pc:sldMkLst>
+        <pc:spChg chg="add mod">
+          <ac:chgData name="Vaughn Staples" userId="9a5933822faaa4bf" providerId="LiveId" clId="{BB914C8C-BCA1-484B-9A1F-EBF33ADB071F}" dt="2026-04-17T19:59:30.726" v="378" actId="20577"/>
+          <ac:spMkLst>
+            <pc:docMk/>
+            <pc:sldMk cId="2191888532" sldId="268"/>
+            <ac:spMk id="2" creationId="{A2DAB68D-1881-D279-E0D4-8709B977E871}"/>
+          </ac:spMkLst>
+        </pc:spChg>
+      </pc:sldChg>
+      <pc:sldChg chg="addSp modSp mod">
+        <pc:chgData name="Vaughn Staples" userId="9a5933822faaa4bf" providerId="LiveId" clId="{BB914C8C-BCA1-484B-9A1F-EBF33ADB071F}" dt="2026-04-17T19:59:40.266" v="392" actId="20577"/>
+        <pc:sldMkLst>
+          <pc:docMk/>
+          <pc:sldMk cId="1581596950" sldId="269"/>
+        </pc:sldMkLst>
+        <pc:spChg chg="add mod">
+          <ac:chgData name="Vaughn Staples" userId="9a5933822faaa4bf" providerId="LiveId" clId="{BB914C8C-BCA1-484B-9A1F-EBF33ADB071F}" dt="2026-04-17T19:59:40.266" v="392" actId="20577"/>
+          <ac:spMkLst>
+            <pc:docMk/>
+            <pc:sldMk cId="1581596950" sldId="269"/>
+            <ac:spMk id="2" creationId="{576CE7BB-05B0-5339-8C2F-72D9A994D600}"/>
+          </ac:spMkLst>
+        </pc:spChg>
+      </pc:sldChg>
+      <pc:sldChg chg="addSp modSp mod">
+        <pc:chgData name="Vaughn Staples" userId="9a5933822faaa4bf" providerId="LiveId" clId="{BB914C8C-BCA1-484B-9A1F-EBF33ADB071F}" dt="2026-04-17T19:59:47.319" v="409" actId="20577"/>
+        <pc:sldMkLst>
+          <pc:docMk/>
+          <pc:sldMk cId="2959754928" sldId="270"/>
+        </pc:sldMkLst>
+        <pc:spChg chg="add mod">
+          <ac:chgData name="Vaughn Staples" userId="9a5933822faaa4bf" providerId="LiveId" clId="{BB914C8C-BCA1-484B-9A1F-EBF33ADB071F}" dt="2026-04-17T19:59:47.319" v="409" actId="20577"/>
+          <ac:spMkLst>
+            <pc:docMk/>
+            <pc:sldMk cId="2959754928" sldId="270"/>
+            <ac:spMk id="2" creationId="{F0D9D447-E892-FEB6-6565-FEE7314F45C2}"/>
+          </ac:spMkLst>
+        </pc:spChg>
+      </pc:sldChg>
+      <pc:sldChg chg="addSp modSp mod">
+        <pc:chgData name="Vaughn Staples" userId="9a5933822faaa4bf" providerId="LiveId" clId="{BB914C8C-BCA1-484B-9A1F-EBF33ADB071F}" dt="2026-04-17T19:59:58.365" v="433" actId="20577"/>
+        <pc:sldMkLst>
+          <pc:docMk/>
+          <pc:sldMk cId="3217210439" sldId="271"/>
+        </pc:sldMkLst>
+        <pc:spChg chg="add mod">
+          <ac:chgData name="Vaughn Staples" userId="9a5933822faaa4bf" providerId="LiveId" clId="{BB914C8C-BCA1-484B-9A1F-EBF33ADB071F}" dt="2026-04-17T19:59:58.365" v="433" actId="20577"/>
+          <ac:spMkLst>
+            <pc:docMk/>
+            <pc:sldMk cId="3217210439" sldId="271"/>
+            <ac:spMk id="2" creationId="{8FFAFCFE-AE6C-60D5-FC14-12EFB7FF9C19}"/>
+          </ac:spMkLst>
+        </pc:spChg>
+      </pc:sldChg>
+      <pc:sldChg chg="addSp delSp modSp new mod">
+        <pc:chgData name="Vaughn Staples" userId="9a5933822faaa4bf" providerId="LiveId" clId="{BB914C8C-BCA1-484B-9A1F-EBF33ADB071F}" dt="2026-04-17T19:57:36.440" v="221" actId="20577"/>
         <pc:sldMkLst>
           <pc:docMk/>
           <pc:sldMk cId="4151877294" sldId="272"/>
         </pc:sldMkLst>
+        <pc:spChg chg="add mod">
+          <ac:chgData name="Vaughn Staples" userId="9a5933822faaa4bf" providerId="LiveId" clId="{BB914C8C-BCA1-484B-9A1F-EBF33ADB071F}" dt="2026-04-17T19:57:36.440" v="221" actId="20577"/>
+          <ac:spMkLst>
+            <pc:docMk/>
+            <pc:sldMk cId="4151877294" sldId="272"/>
+            <ac:spMk id="2" creationId="{1F15F0B2-F689-6D95-6CEA-FD91CD01A86C}"/>
+          </ac:spMkLst>
+        </pc:spChg>
         <pc:picChg chg="add">
           <ac:chgData name="Vaughn Staples" userId="9a5933822faaa4bf" providerId="LiveId" clId="{BB914C8C-BCA1-484B-9A1F-EBF33ADB071F}" dt="2026-04-10T05:06:58.152" v="12" actId="22"/>
           <ac:picMkLst>
@@ -201,12 +444,20 @@
           </ac:picMkLst>
         </pc:picChg>
       </pc:sldChg>
-      <pc:sldChg chg="addSp delSp new mod">
-        <pc:chgData name="Vaughn Staples" userId="9a5933822faaa4bf" providerId="LiveId" clId="{BB914C8C-BCA1-484B-9A1F-EBF33ADB071F}" dt="2026-04-10T05:07:21.824" v="15" actId="22"/>
+      <pc:sldChg chg="addSp delSp modSp new mod">
+        <pc:chgData name="Vaughn Staples" userId="9a5933822faaa4bf" providerId="LiveId" clId="{BB914C8C-BCA1-484B-9A1F-EBF33ADB071F}" dt="2026-04-17T19:58:03.872" v="246" actId="20577"/>
         <pc:sldMkLst>
           <pc:docMk/>
           <pc:sldMk cId="1866357744" sldId="273"/>
         </pc:sldMkLst>
+        <pc:spChg chg="add mod">
+          <ac:chgData name="Vaughn Staples" userId="9a5933822faaa4bf" providerId="LiveId" clId="{BB914C8C-BCA1-484B-9A1F-EBF33ADB071F}" dt="2026-04-17T19:58:03.872" v="246" actId="20577"/>
+          <ac:spMkLst>
+            <pc:docMk/>
+            <pc:sldMk cId="1866357744" sldId="273"/>
+            <ac:spMk id="2" creationId="{B4D36368-1EF0-FAB0-D6DC-7E319FA6647C}"/>
+          </ac:spMkLst>
+        </pc:spChg>
         <pc:picChg chg="add">
           <ac:chgData name="Vaughn Staples" userId="9a5933822faaa4bf" providerId="LiveId" clId="{BB914C8C-BCA1-484B-9A1F-EBF33ADB071F}" dt="2026-04-10T05:07:21.824" v="15" actId="22"/>
           <ac:picMkLst>
@@ -216,12 +467,20 @@
           </ac:picMkLst>
         </pc:picChg>
       </pc:sldChg>
-      <pc:sldChg chg="addSp delSp new mod">
-        <pc:chgData name="Vaughn Staples" userId="9a5933822faaa4bf" providerId="LiveId" clId="{BB914C8C-BCA1-484B-9A1F-EBF33ADB071F}" dt="2026-04-10T05:08:04.851" v="18" actId="22"/>
+      <pc:sldChg chg="addSp delSp modSp new mod">
+        <pc:chgData name="Vaughn Staples" userId="9a5933822faaa4bf" providerId="LiveId" clId="{BB914C8C-BCA1-484B-9A1F-EBF33ADB071F}" dt="2026-04-17T19:58:13.168" v="256" actId="20577"/>
         <pc:sldMkLst>
           <pc:docMk/>
           <pc:sldMk cId="539954587" sldId="274"/>
         </pc:sldMkLst>
+        <pc:spChg chg="add mod">
+          <ac:chgData name="Vaughn Staples" userId="9a5933822faaa4bf" providerId="LiveId" clId="{BB914C8C-BCA1-484B-9A1F-EBF33ADB071F}" dt="2026-04-17T19:58:13.168" v="256" actId="20577"/>
+          <ac:spMkLst>
+            <pc:docMk/>
+            <pc:sldMk cId="539954587" sldId="274"/>
+            <ac:spMk id="2" creationId="{3C711241-BA61-2E5D-3792-823EC8191A55}"/>
+          </ac:spMkLst>
+        </pc:spChg>
         <pc:picChg chg="add">
           <ac:chgData name="Vaughn Staples" userId="9a5933822faaa4bf" providerId="LiveId" clId="{BB914C8C-BCA1-484B-9A1F-EBF33ADB071F}" dt="2026-04-10T05:08:04.851" v="18" actId="22"/>
           <ac:picMkLst>
@@ -231,12 +490,20 @@
           </ac:picMkLst>
         </pc:picChg>
       </pc:sldChg>
-      <pc:sldChg chg="addSp delSp new mod">
-        <pc:chgData name="Vaughn Staples" userId="9a5933822faaa4bf" providerId="LiveId" clId="{BB914C8C-BCA1-484B-9A1F-EBF33ADB071F}" dt="2026-04-10T05:08:19.544" v="21" actId="22"/>
+      <pc:sldChg chg="addSp delSp modSp new mod">
+        <pc:chgData name="Vaughn Staples" userId="9a5933822faaa4bf" providerId="LiveId" clId="{BB914C8C-BCA1-484B-9A1F-EBF33ADB071F}" dt="2026-04-17T19:58:22.340" v="281" actId="20577"/>
         <pc:sldMkLst>
           <pc:docMk/>
           <pc:sldMk cId="2248252599" sldId="275"/>
         </pc:sldMkLst>
+        <pc:spChg chg="add mod">
+          <ac:chgData name="Vaughn Staples" userId="9a5933822faaa4bf" providerId="LiveId" clId="{BB914C8C-BCA1-484B-9A1F-EBF33ADB071F}" dt="2026-04-17T19:58:22.340" v="281" actId="20577"/>
+          <ac:spMkLst>
+            <pc:docMk/>
+            <pc:sldMk cId="2248252599" sldId="275"/>
+            <ac:spMk id="2" creationId="{3849F261-26C5-32DE-D8BC-E8C1BD6EA9E1}"/>
+          </ac:spMkLst>
+        </pc:spChg>
         <pc:picChg chg="add">
           <ac:chgData name="Vaughn Staples" userId="9a5933822faaa4bf" providerId="LiveId" clId="{BB914C8C-BCA1-484B-9A1F-EBF33ADB071F}" dt="2026-04-10T05:08:19.544" v="21" actId="22"/>
           <ac:picMkLst>
@@ -246,18 +513,34 @@
           </ac:picMkLst>
         </pc:picChg>
       </pc:sldChg>
-      <pc:sldChg chg="addSp new mod">
-        <pc:chgData name="Vaughn Staples" userId="9a5933822faaa4bf" providerId="LiveId" clId="{BB914C8C-BCA1-484B-9A1F-EBF33ADB071F}" dt="2026-04-14T08:44:57.138" v="23" actId="22"/>
+      <pc:sldChg chg="addSp delSp modSp new mod">
+        <pc:chgData name="Vaughn Staples" userId="9a5933822faaa4bf" providerId="LiveId" clId="{BB914C8C-BCA1-484B-9A1F-EBF33ADB071F}" dt="2026-04-17T20:01:10.532" v="465" actId="20577"/>
         <pc:sldMkLst>
           <pc:docMk/>
           <pc:sldMk cId="3372478806" sldId="276"/>
         </pc:sldMkLst>
-        <pc:picChg chg="add">
-          <ac:chgData name="Vaughn Staples" userId="9a5933822faaa4bf" providerId="LiveId" clId="{BB914C8C-BCA1-484B-9A1F-EBF33ADB071F}" dt="2026-04-14T08:44:57.138" v="23" actId="22"/>
+        <pc:spChg chg="add mod">
+          <ac:chgData name="Vaughn Staples" userId="9a5933822faaa4bf" providerId="LiveId" clId="{BB914C8C-BCA1-484B-9A1F-EBF33ADB071F}" dt="2026-04-17T20:01:10.532" v="465" actId="20577"/>
+          <ac:spMkLst>
+            <pc:docMk/>
+            <pc:sldMk cId="3372478806" sldId="276"/>
+            <ac:spMk id="7" creationId="{D2C583F9-250F-C554-FFB0-6CBBB6451AA4}"/>
+          </ac:spMkLst>
+        </pc:spChg>
+        <pc:picChg chg="add del">
+          <ac:chgData name="Vaughn Staples" userId="9a5933822faaa4bf" providerId="LiveId" clId="{BB914C8C-BCA1-484B-9A1F-EBF33ADB071F}" dt="2026-04-17T20:00:14.746" v="434" actId="478"/>
           <ac:picMkLst>
             <pc:docMk/>
             <pc:sldMk cId="3372478806" sldId="276"/>
             <ac:picMk id="5" creationId="{44403891-F23A-3FDD-4ACE-7CF67A0BD267}"/>
+          </ac:picMkLst>
+        </pc:picChg>
+        <pc:picChg chg="add">
+          <ac:chgData name="Vaughn Staples" userId="9a5933822faaa4bf" providerId="LiveId" clId="{BB914C8C-BCA1-484B-9A1F-EBF33ADB071F}" dt="2026-04-17T20:00:52.895" v="435" actId="22"/>
+          <ac:picMkLst>
+            <pc:docMk/>
+            <pc:sldMk cId="3372478806" sldId="276"/>
+            <ac:picMk id="6" creationId="{C751CF2D-281E-AE25-77C4-829BA73EE4FB}"/>
           </ac:picMkLst>
         </pc:picChg>
       </pc:sldChg>
@@ -413,7 +696,7 @@
           <a:p>
             <a:fld id="{39DFAE05-33A5-42B2-8B0E-BC60315FEFBC}" type="datetimeFigureOut">
               <a:rPr lang="en-US" smtClean="0"/>
-              <a:t>4/14/2026</a:t>
+              <a:t>4/18/2026</a:t>
             </a:fld>
             <a:endParaRPr lang="en-US"/>
           </a:p>
@@ -611,7 +894,7 @@
           <a:p>
             <a:fld id="{39DFAE05-33A5-42B2-8B0E-BC60315FEFBC}" type="datetimeFigureOut">
               <a:rPr lang="en-US" smtClean="0"/>
-              <a:t>4/14/2026</a:t>
+              <a:t>4/18/2026</a:t>
             </a:fld>
             <a:endParaRPr lang="en-US"/>
           </a:p>
@@ -819,7 +1102,7 @@
           <a:p>
             <a:fld id="{39DFAE05-33A5-42B2-8B0E-BC60315FEFBC}" type="datetimeFigureOut">
               <a:rPr lang="en-US" smtClean="0"/>
-              <a:t>4/14/2026</a:t>
+              <a:t>4/18/2026</a:t>
             </a:fld>
             <a:endParaRPr lang="en-US"/>
           </a:p>
@@ -1017,7 +1300,7 @@
           <a:p>
             <a:fld id="{39DFAE05-33A5-42B2-8B0E-BC60315FEFBC}" type="datetimeFigureOut">
               <a:rPr lang="en-US" smtClean="0"/>
-              <a:t>4/14/2026</a:t>
+              <a:t>4/18/2026</a:t>
             </a:fld>
             <a:endParaRPr lang="en-US"/>
           </a:p>
@@ -1292,7 +1575,7 @@
           <a:p>
             <a:fld id="{39DFAE05-33A5-42B2-8B0E-BC60315FEFBC}" type="datetimeFigureOut">
               <a:rPr lang="en-US" smtClean="0"/>
-              <a:t>4/14/2026</a:t>
+              <a:t>4/18/2026</a:t>
             </a:fld>
             <a:endParaRPr lang="en-US"/>
           </a:p>
@@ -1557,7 +1840,7 @@
           <a:p>
             <a:fld id="{39DFAE05-33A5-42B2-8B0E-BC60315FEFBC}" type="datetimeFigureOut">
               <a:rPr lang="en-US" smtClean="0"/>
-              <a:t>4/14/2026</a:t>
+              <a:t>4/18/2026</a:t>
             </a:fld>
             <a:endParaRPr lang="en-US"/>
           </a:p>
@@ -1969,7 +2252,7 @@
           <a:p>
             <a:fld id="{39DFAE05-33A5-42B2-8B0E-BC60315FEFBC}" type="datetimeFigureOut">
               <a:rPr lang="en-US" smtClean="0"/>
-              <a:t>4/14/2026</a:t>
+              <a:t>4/18/2026</a:t>
             </a:fld>
             <a:endParaRPr lang="en-US"/>
           </a:p>
@@ -2110,7 +2393,7 @@
           <a:p>
             <a:fld id="{39DFAE05-33A5-42B2-8B0E-BC60315FEFBC}" type="datetimeFigureOut">
               <a:rPr lang="en-US" smtClean="0"/>
-              <a:t>4/14/2026</a:t>
+              <a:t>4/18/2026</a:t>
             </a:fld>
             <a:endParaRPr lang="en-US"/>
           </a:p>
@@ -2223,7 +2506,7 @@
           <a:p>
             <a:fld id="{39DFAE05-33A5-42B2-8B0E-BC60315FEFBC}" type="datetimeFigureOut">
               <a:rPr lang="en-US" smtClean="0"/>
-              <a:t>4/14/2026</a:t>
+              <a:t>4/18/2026</a:t>
             </a:fld>
             <a:endParaRPr lang="en-US"/>
           </a:p>
@@ -2534,7 +2817,7 @@
           <a:p>
             <a:fld id="{39DFAE05-33A5-42B2-8B0E-BC60315FEFBC}" type="datetimeFigureOut">
               <a:rPr lang="en-US" smtClean="0"/>
-              <a:t>4/14/2026</a:t>
+              <a:t>4/18/2026</a:t>
             </a:fld>
             <a:endParaRPr lang="en-US"/>
           </a:p>
@@ -2822,7 +3105,7 @@
           <a:p>
             <a:fld id="{39DFAE05-33A5-42B2-8B0E-BC60315FEFBC}" type="datetimeFigureOut">
               <a:rPr lang="en-US" smtClean="0"/>
-              <a:t>4/14/2026</a:t>
+              <a:t>4/18/2026</a:t>
             </a:fld>
             <a:endParaRPr lang="en-US"/>
           </a:p>
@@ -3063,7 +3346,7 @@
           <a:p>
             <a:fld id="{39DFAE05-33A5-42B2-8B0E-BC60315FEFBC}" type="datetimeFigureOut">
               <a:rPr lang="en-US" smtClean="0"/>
-              <a:t>4/14/2026</a:t>
+              <a:t>4/18/2026</a:t>
             </a:fld>
             <a:endParaRPr lang="en-US"/>
           </a:p>
@@ -3510,6 +3793,54 @@
           </a:prstGeom>
         </p:spPr>
       </p:pic>
+      <p:sp>
+        <p:nvSpPr>
+          <p:cNvPr id="2" name="TextBox 1">
+            <a:extLst>
+              <a:ext uri="{FF2B5EF4-FFF2-40B4-BE49-F238E27FC236}">
+                <a16:creationId xmlns:a16="http://schemas.microsoft.com/office/drawing/2014/main" id="{BD7F26B6-5FAE-3204-138C-61DB43C1B430}"/>
+              </a:ext>
+            </a:extLst>
+          </p:cNvPr>
+          <p:cNvSpPr txBox="1"/>
+          <p:nvPr/>
+        </p:nvSpPr>
+        <p:spPr>
+          <a:xfrm>
+            <a:off x="-1" y="719190"/>
+            <a:ext cx="12192000" cy="369332"/>
+          </a:xfrm>
+          <a:prstGeom prst="rect">
+            <a:avLst/>
+          </a:prstGeom>
+          <a:noFill/>
+        </p:spPr>
+        <p:txBody>
+          <a:bodyPr wrap="square" rtlCol="0">
+            <a:spAutoFit/>
+          </a:bodyPr>
+          <a:lstStyle/>
+          <a:p>
+            <a:pPr algn="ctr"/>
+            <a:r>
+              <a:rPr lang="en-US" b="1" dirty="0">
+                <a:solidFill>
+                  <a:srgbClr val="FFFF00"/>
+                </a:solidFill>
+              </a:rPr>
+              <a:t>PROJECTHUD </a:t>
+            </a:r>
+            <a:r>
+              <a:rPr lang="en-US" b="1" dirty="0">
+                <a:solidFill>
+                  <a:schemeClr val="bg1"/>
+                </a:solidFill>
+              </a:rPr>
+              <a:t>DASHBOARD</a:t>
+            </a:r>
+          </a:p>
+        </p:txBody>
+      </p:sp>
     </p:spTree>
     <p:extLst>
       <p:ext uri="{BB962C8B-B14F-4D97-AF65-F5344CB8AC3E}">
@@ -3570,6 +3901,54 @@
           </a:prstGeom>
         </p:spPr>
       </p:pic>
+      <p:sp>
+        <p:nvSpPr>
+          <p:cNvPr id="2" name="TextBox 1">
+            <a:extLst>
+              <a:ext uri="{FF2B5EF4-FFF2-40B4-BE49-F238E27FC236}">
+                <a16:creationId xmlns:a16="http://schemas.microsoft.com/office/drawing/2014/main" id="{1F15F0B2-F689-6D95-6CEA-FD91CD01A86C}"/>
+              </a:ext>
+            </a:extLst>
+          </p:cNvPr>
+          <p:cNvSpPr txBox="1"/>
+          <p:nvPr/>
+        </p:nvSpPr>
+        <p:spPr>
+          <a:xfrm>
+            <a:off x="0" y="719190"/>
+            <a:ext cx="12192000" cy="369332"/>
+          </a:xfrm>
+          <a:prstGeom prst="rect">
+            <a:avLst/>
+          </a:prstGeom>
+          <a:noFill/>
+        </p:spPr>
+        <p:txBody>
+          <a:bodyPr wrap="square" rtlCol="0">
+            <a:spAutoFit/>
+          </a:bodyPr>
+          <a:lstStyle/>
+          <a:p>
+            <a:pPr algn="ctr"/>
+            <a:r>
+              <a:rPr lang="en-US" b="1" dirty="0">
+                <a:solidFill>
+                  <a:srgbClr val="FFFF00"/>
+                </a:solidFill>
+              </a:rPr>
+              <a:t>CADENCE </a:t>
+            </a:r>
+            <a:r>
+              <a:rPr lang="en-US" b="1" dirty="0">
+                <a:solidFill>
+                  <a:schemeClr val="bg1"/>
+                </a:solidFill>
+              </a:rPr>
+              <a:t>COVERAGE SIMULATION</a:t>
+            </a:r>
+          </a:p>
+        </p:txBody>
+      </p:sp>
     </p:spTree>
     <p:extLst>
       <p:ext uri="{BB962C8B-B14F-4D97-AF65-F5344CB8AC3E}">
@@ -3630,6 +4009,54 @@
           </a:prstGeom>
         </p:spPr>
       </p:pic>
+      <p:sp>
+        <p:nvSpPr>
+          <p:cNvPr id="2" name="TextBox 1">
+            <a:extLst>
+              <a:ext uri="{FF2B5EF4-FFF2-40B4-BE49-F238E27FC236}">
+                <a16:creationId xmlns:a16="http://schemas.microsoft.com/office/drawing/2014/main" id="{B4D36368-1EF0-FAB0-D6DC-7E319FA6647C}"/>
+              </a:ext>
+            </a:extLst>
+          </p:cNvPr>
+          <p:cNvSpPr txBox="1"/>
+          <p:nvPr/>
+        </p:nvSpPr>
+        <p:spPr>
+          <a:xfrm>
+            <a:off x="0" y="719190"/>
+            <a:ext cx="12192000" cy="369332"/>
+          </a:xfrm>
+          <a:prstGeom prst="rect">
+            <a:avLst/>
+          </a:prstGeom>
+          <a:noFill/>
+        </p:spPr>
+        <p:txBody>
+          <a:bodyPr wrap="square" rtlCol="0">
+            <a:spAutoFit/>
+          </a:bodyPr>
+          <a:lstStyle/>
+          <a:p>
+            <a:pPr algn="ctr"/>
+            <a:r>
+              <a:rPr lang="en-US" b="1" dirty="0">
+                <a:solidFill>
+                  <a:srgbClr val="FFFF00"/>
+                </a:solidFill>
+              </a:rPr>
+              <a:t>CADENCE </a:t>
+            </a:r>
+            <a:r>
+              <a:rPr lang="en-US" b="1" dirty="0">
+                <a:solidFill>
+                  <a:schemeClr val="bg1"/>
+                </a:solidFill>
+              </a:rPr>
+              <a:t>SIMULATION SCRIPT EDITOR</a:t>
+            </a:r>
+          </a:p>
+        </p:txBody>
+      </p:sp>
     </p:spTree>
     <p:extLst>
       <p:ext uri="{BB962C8B-B14F-4D97-AF65-F5344CB8AC3E}">
@@ -3690,6 +4117,54 @@
           </a:prstGeom>
         </p:spPr>
       </p:pic>
+      <p:sp>
+        <p:nvSpPr>
+          <p:cNvPr id="2" name="TextBox 1">
+            <a:extLst>
+              <a:ext uri="{FF2B5EF4-FFF2-40B4-BE49-F238E27FC236}">
+                <a16:creationId xmlns:a16="http://schemas.microsoft.com/office/drawing/2014/main" id="{3C711241-BA61-2E5D-3792-823EC8191A55}"/>
+              </a:ext>
+            </a:extLst>
+          </p:cNvPr>
+          <p:cNvSpPr txBox="1"/>
+          <p:nvPr/>
+        </p:nvSpPr>
+        <p:spPr>
+          <a:xfrm>
+            <a:off x="0" y="719190"/>
+            <a:ext cx="12192000" cy="369332"/>
+          </a:xfrm>
+          <a:prstGeom prst="rect">
+            <a:avLst/>
+          </a:prstGeom>
+          <a:noFill/>
+        </p:spPr>
+        <p:txBody>
+          <a:bodyPr wrap="square" rtlCol="0">
+            <a:spAutoFit/>
+          </a:bodyPr>
+          <a:lstStyle/>
+          <a:p>
+            <a:pPr algn="ctr"/>
+            <a:r>
+              <a:rPr lang="en-US" b="1" dirty="0">
+                <a:solidFill>
+                  <a:srgbClr val="FFFF00"/>
+                </a:solidFill>
+              </a:rPr>
+              <a:t>CADENCE </a:t>
+            </a:r>
+            <a:r>
+              <a:rPr lang="en-US" b="1" dirty="0">
+                <a:solidFill>
+                  <a:schemeClr val="bg1"/>
+                </a:solidFill>
+              </a:rPr>
+              <a:t>WORKFLOW SIMULATOR</a:t>
+            </a:r>
+          </a:p>
+        </p:txBody>
+      </p:sp>
     </p:spTree>
     <p:extLst>
       <p:ext uri="{BB962C8B-B14F-4D97-AF65-F5344CB8AC3E}">
@@ -3750,6 +4225,54 @@
           </a:prstGeom>
         </p:spPr>
       </p:pic>
+      <p:sp>
+        <p:nvSpPr>
+          <p:cNvPr id="2" name="TextBox 1">
+            <a:extLst>
+              <a:ext uri="{FF2B5EF4-FFF2-40B4-BE49-F238E27FC236}">
+                <a16:creationId xmlns:a16="http://schemas.microsoft.com/office/drawing/2014/main" id="{3849F261-26C5-32DE-D8BC-E8C1BD6EA9E1}"/>
+              </a:ext>
+            </a:extLst>
+          </p:cNvPr>
+          <p:cNvSpPr txBox="1"/>
+          <p:nvPr/>
+        </p:nvSpPr>
+        <p:spPr>
+          <a:xfrm>
+            <a:off x="0" y="719190"/>
+            <a:ext cx="12192000" cy="369332"/>
+          </a:xfrm>
+          <a:prstGeom prst="rect">
+            <a:avLst/>
+          </a:prstGeom>
+          <a:noFill/>
+        </p:spPr>
+        <p:txBody>
+          <a:bodyPr wrap="square" rtlCol="0">
+            <a:spAutoFit/>
+          </a:bodyPr>
+          <a:lstStyle/>
+          <a:p>
+            <a:pPr algn="ctr"/>
+            <a:r>
+              <a:rPr lang="en-US" b="1" dirty="0">
+                <a:solidFill>
+                  <a:srgbClr val="FFFF00"/>
+                </a:solidFill>
+              </a:rPr>
+              <a:t>CADENCE </a:t>
+            </a:r>
+            <a:r>
+              <a:rPr lang="en-US" b="1" dirty="0">
+                <a:solidFill>
+                  <a:schemeClr val="bg1"/>
+                </a:solidFill>
+              </a:rPr>
+              <a:t>SIMULATION CERTIFICATE</a:t>
+            </a:r>
+          </a:p>
+        </p:txBody>
+      </p:sp>
     </p:spTree>
     <p:extLst>
       <p:ext uri="{BB962C8B-B14F-4D97-AF65-F5344CB8AC3E}">
@@ -3810,6 +4333,54 @@
           </a:prstGeom>
         </p:spPr>
       </p:pic>
+      <p:sp>
+        <p:nvSpPr>
+          <p:cNvPr id="2" name="TextBox 1">
+            <a:extLst>
+              <a:ext uri="{FF2B5EF4-FFF2-40B4-BE49-F238E27FC236}">
+                <a16:creationId xmlns:a16="http://schemas.microsoft.com/office/drawing/2014/main" id="{A7E94B87-E082-30CF-543A-1D4E88C0001F}"/>
+              </a:ext>
+            </a:extLst>
+          </p:cNvPr>
+          <p:cNvSpPr txBox="1"/>
+          <p:nvPr/>
+        </p:nvSpPr>
+        <p:spPr>
+          <a:xfrm>
+            <a:off x="0" y="719190"/>
+            <a:ext cx="12192000" cy="369332"/>
+          </a:xfrm>
+          <a:prstGeom prst="rect">
+            <a:avLst/>
+          </a:prstGeom>
+          <a:noFill/>
+        </p:spPr>
+        <p:txBody>
+          <a:bodyPr wrap="square" rtlCol="0">
+            <a:spAutoFit/>
+          </a:bodyPr>
+          <a:lstStyle/>
+          <a:p>
+            <a:pPr algn="ctr"/>
+            <a:r>
+              <a:rPr lang="en-US" b="1" dirty="0">
+                <a:solidFill>
+                  <a:srgbClr val="FFFF00"/>
+                </a:solidFill>
+              </a:rPr>
+              <a:t>COMPASS </a:t>
+            </a:r>
+            <a:r>
+              <a:rPr lang="en-US" b="1" dirty="0">
+                <a:solidFill>
+                  <a:schemeClr val="bg1"/>
+                </a:solidFill>
+              </a:rPr>
+              <a:t>PERSONAL DASHBOARD</a:t>
+            </a:r>
+          </a:p>
+        </p:txBody>
+      </p:sp>
     </p:spTree>
     <p:extLst>
       <p:ext uri="{BB962C8B-B14F-4D97-AF65-F5344CB8AC3E}">
@@ -3870,6 +4441,54 @@
           </a:prstGeom>
         </p:spPr>
       </p:pic>
+      <p:sp>
+        <p:nvSpPr>
+          <p:cNvPr id="3" name="TextBox 2">
+            <a:extLst>
+              <a:ext uri="{FF2B5EF4-FFF2-40B4-BE49-F238E27FC236}">
+                <a16:creationId xmlns:a16="http://schemas.microsoft.com/office/drawing/2014/main" id="{980CE395-65D0-210F-2A84-04F11CA26843}"/>
+              </a:ext>
+            </a:extLst>
+          </p:cNvPr>
+          <p:cNvSpPr txBox="1"/>
+          <p:nvPr/>
+        </p:nvSpPr>
+        <p:spPr>
+          <a:xfrm>
+            <a:off x="0" y="719190"/>
+            <a:ext cx="12192000" cy="369332"/>
+          </a:xfrm>
+          <a:prstGeom prst="rect">
+            <a:avLst/>
+          </a:prstGeom>
+          <a:noFill/>
+        </p:spPr>
+        <p:txBody>
+          <a:bodyPr wrap="square" rtlCol="0">
+            <a:spAutoFit/>
+          </a:bodyPr>
+          <a:lstStyle/>
+          <a:p>
+            <a:pPr algn="ctr"/>
+            <a:r>
+              <a:rPr lang="en-US" b="1" dirty="0">
+                <a:solidFill>
+                  <a:srgbClr val="FFFF00"/>
+                </a:solidFill>
+              </a:rPr>
+              <a:t>COMPASS </a:t>
+            </a:r>
+            <a:r>
+              <a:rPr lang="en-US" b="1" dirty="0">
+                <a:solidFill>
+                  <a:schemeClr val="bg1"/>
+                </a:solidFill>
+              </a:rPr>
+              <a:t>TIME ENTRY</a:t>
+            </a:r>
+          </a:p>
+        </p:txBody>
+      </p:sp>
     </p:spTree>
     <p:extLst>
       <p:ext uri="{BB962C8B-B14F-4D97-AF65-F5344CB8AC3E}">
@@ -3930,6 +4549,54 @@
           </a:prstGeom>
         </p:spPr>
       </p:pic>
+      <p:sp>
+        <p:nvSpPr>
+          <p:cNvPr id="2" name="TextBox 1">
+            <a:extLst>
+              <a:ext uri="{FF2B5EF4-FFF2-40B4-BE49-F238E27FC236}">
+                <a16:creationId xmlns:a16="http://schemas.microsoft.com/office/drawing/2014/main" id="{B446DA73-7280-77A6-D38A-318EF95C6F96}"/>
+              </a:ext>
+            </a:extLst>
+          </p:cNvPr>
+          <p:cNvSpPr txBox="1"/>
+          <p:nvPr/>
+        </p:nvSpPr>
+        <p:spPr>
+          <a:xfrm>
+            <a:off x="0" y="719190"/>
+            <a:ext cx="12192000" cy="369332"/>
+          </a:xfrm>
+          <a:prstGeom prst="rect">
+            <a:avLst/>
+          </a:prstGeom>
+          <a:noFill/>
+        </p:spPr>
+        <p:txBody>
+          <a:bodyPr wrap="square" rtlCol="0">
+            <a:spAutoFit/>
+          </a:bodyPr>
+          <a:lstStyle/>
+          <a:p>
+            <a:pPr algn="ctr"/>
+            <a:r>
+              <a:rPr lang="en-US" b="1" dirty="0">
+                <a:solidFill>
+                  <a:srgbClr val="FFFF00"/>
+                </a:solidFill>
+              </a:rPr>
+              <a:t>COMPASS </a:t>
+            </a:r>
+            <a:r>
+              <a:rPr lang="en-US" b="1" dirty="0">
+                <a:solidFill>
+                  <a:schemeClr val="bg1"/>
+                </a:solidFill>
+              </a:rPr>
+              <a:t>CALENDAR/TASK MANAGEMENT</a:t>
+            </a:r>
+          </a:p>
+        </p:txBody>
+      </p:sp>
     </p:spTree>
     <p:extLst>
       <p:ext uri="{BB962C8B-B14F-4D97-AF65-F5344CB8AC3E}">
@@ -3990,6 +4657,54 @@
           </a:prstGeom>
         </p:spPr>
       </p:pic>
+      <p:sp>
+        <p:nvSpPr>
+          <p:cNvPr id="2" name="TextBox 1">
+            <a:extLst>
+              <a:ext uri="{FF2B5EF4-FFF2-40B4-BE49-F238E27FC236}">
+                <a16:creationId xmlns:a16="http://schemas.microsoft.com/office/drawing/2014/main" id="{A2DAB68D-1881-D279-E0D4-8709B977E871}"/>
+              </a:ext>
+            </a:extLst>
+          </p:cNvPr>
+          <p:cNvSpPr txBox="1"/>
+          <p:nvPr/>
+        </p:nvSpPr>
+        <p:spPr>
+          <a:xfrm>
+            <a:off x="0" y="719190"/>
+            <a:ext cx="12192000" cy="369332"/>
+          </a:xfrm>
+          <a:prstGeom prst="rect">
+            <a:avLst/>
+          </a:prstGeom>
+          <a:noFill/>
+        </p:spPr>
+        <p:txBody>
+          <a:bodyPr wrap="square" rtlCol="0">
+            <a:spAutoFit/>
+          </a:bodyPr>
+          <a:lstStyle/>
+          <a:p>
+            <a:pPr algn="ctr"/>
+            <a:r>
+              <a:rPr lang="en-US" b="1" dirty="0">
+                <a:solidFill>
+                  <a:srgbClr val="FFFF00"/>
+                </a:solidFill>
+              </a:rPr>
+              <a:t>COMPASS </a:t>
+            </a:r>
+            <a:r>
+              <a:rPr lang="en-US" b="1" dirty="0">
+                <a:solidFill>
+                  <a:schemeClr val="bg1"/>
+                </a:solidFill>
+              </a:rPr>
+              <a:t>MEETING MINUTES MANAGER</a:t>
+            </a:r>
+          </a:p>
+        </p:txBody>
+      </p:sp>
     </p:spTree>
     <p:extLst>
       <p:ext uri="{BB962C8B-B14F-4D97-AF65-F5344CB8AC3E}">
@@ -4050,6 +4765,54 @@
           </a:prstGeom>
         </p:spPr>
       </p:pic>
+      <p:sp>
+        <p:nvSpPr>
+          <p:cNvPr id="2" name="TextBox 1">
+            <a:extLst>
+              <a:ext uri="{FF2B5EF4-FFF2-40B4-BE49-F238E27FC236}">
+                <a16:creationId xmlns:a16="http://schemas.microsoft.com/office/drawing/2014/main" id="{576CE7BB-05B0-5339-8C2F-72D9A994D600}"/>
+              </a:ext>
+            </a:extLst>
+          </p:cNvPr>
+          <p:cNvSpPr txBox="1"/>
+          <p:nvPr/>
+        </p:nvSpPr>
+        <p:spPr>
+          <a:xfrm>
+            <a:off x="0" y="719190"/>
+            <a:ext cx="12192000" cy="369332"/>
+          </a:xfrm>
+          <a:prstGeom prst="rect">
+            <a:avLst/>
+          </a:prstGeom>
+          <a:noFill/>
+        </p:spPr>
+        <p:txBody>
+          <a:bodyPr wrap="square" rtlCol="0">
+            <a:spAutoFit/>
+          </a:bodyPr>
+          <a:lstStyle/>
+          <a:p>
+            <a:pPr algn="ctr"/>
+            <a:r>
+              <a:rPr lang="en-US" b="1" dirty="0">
+                <a:solidFill>
+                  <a:srgbClr val="FFFF00"/>
+                </a:solidFill>
+              </a:rPr>
+              <a:t>COMPASS </a:t>
+            </a:r>
+            <a:r>
+              <a:rPr lang="en-US" b="1" dirty="0">
+                <a:solidFill>
+                  <a:schemeClr val="bg1"/>
+                </a:solidFill>
+              </a:rPr>
+              <a:t>VIEWS MANAGER</a:t>
+            </a:r>
+          </a:p>
+        </p:txBody>
+      </p:sp>
     </p:spTree>
     <p:extLst>
       <p:ext uri="{BB962C8B-B14F-4D97-AF65-F5344CB8AC3E}">
@@ -4110,6 +4873,54 @@
           </a:prstGeom>
         </p:spPr>
       </p:pic>
+      <p:sp>
+        <p:nvSpPr>
+          <p:cNvPr id="2" name="TextBox 1">
+            <a:extLst>
+              <a:ext uri="{FF2B5EF4-FFF2-40B4-BE49-F238E27FC236}">
+                <a16:creationId xmlns:a16="http://schemas.microsoft.com/office/drawing/2014/main" id="{F0D9D447-E892-FEB6-6565-FEE7314F45C2}"/>
+              </a:ext>
+            </a:extLst>
+          </p:cNvPr>
+          <p:cNvSpPr txBox="1"/>
+          <p:nvPr/>
+        </p:nvSpPr>
+        <p:spPr>
+          <a:xfrm>
+            <a:off x="0" y="719190"/>
+            <a:ext cx="12192000" cy="369332"/>
+          </a:xfrm>
+          <a:prstGeom prst="rect">
+            <a:avLst/>
+          </a:prstGeom>
+          <a:noFill/>
+        </p:spPr>
+        <p:txBody>
+          <a:bodyPr wrap="square" rtlCol="0">
+            <a:spAutoFit/>
+          </a:bodyPr>
+          <a:lstStyle/>
+          <a:p>
+            <a:pPr algn="ctr"/>
+            <a:r>
+              <a:rPr lang="en-US" b="1" dirty="0">
+                <a:solidFill>
+                  <a:srgbClr val="FFFF00"/>
+                </a:solidFill>
+              </a:rPr>
+              <a:t>COMPASS </a:t>
+            </a:r>
+            <a:r>
+              <a:rPr lang="en-US" b="1" dirty="0">
+                <a:solidFill>
+                  <a:schemeClr val="bg1"/>
+                </a:solidFill>
+              </a:rPr>
+              <a:t>NOTES MANAGEMENT</a:t>
+            </a:r>
+          </a:p>
+        </p:txBody>
+      </p:sp>
     </p:spTree>
     <p:extLst>
       <p:ext uri="{BB962C8B-B14F-4D97-AF65-F5344CB8AC3E}">
@@ -4170,6 +4981,62 @@
           </a:prstGeom>
         </p:spPr>
       </p:pic>
+      <p:sp>
+        <p:nvSpPr>
+          <p:cNvPr id="2" name="TextBox 1">
+            <a:extLst>
+              <a:ext uri="{FF2B5EF4-FFF2-40B4-BE49-F238E27FC236}">
+                <a16:creationId xmlns:a16="http://schemas.microsoft.com/office/drawing/2014/main" id="{BE0E9318-B302-163B-52D7-7924D230E411}"/>
+              </a:ext>
+            </a:extLst>
+          </p:cNvPr>
+          <p:cNvSpPr txBox="1"/>
+          <p:nvPr/>
+        </p:nvSpPr>
+        <p:spPr>
+          <a:xfrm>
+            <a:off x="0" y="719190"/>
+            <a:ext cx="12192000" cy="369332"/>
+          </a:xfrm>
+          <a:prstGeom prst="rect">
+            <a:avLst/>
+          </a:prstGeom>
+          <a:noFill/>
+        </p:spPr>
+        <p:txBody>
+          <a:bodyPr wrap="square" rtlCol="0">
+            <a:spAutoFit/>
+          </a:bodyPr>
+          <a:lstStyle/>
+          <a:p>
+            <a:pPr algn="ctr"/>
+            <a:r>
+              <a:rPr lang="en-US" b="1" dirty="0">
+                <a:solidFill>
+                  <a:srgbClr val="FFFF00"/>
+                </a:solidFill>
+              </a:rPr>
+              <a:t>PROJECTHUD </a:t>
+            </a:r>
+            <a:r>
+              <a:rPr lang="en-US" b="1" dirty="0">
+                <a:solidFill>
+                  <a:schemeClr val="bg1"/>
+                </a:solidFill>
+              </a:rPr>
+              <a:t>PROJECT</a:t>
+            </a:r>
+            <a:r>
+              <a:rPr lang="en-US" b="1" dirty="0">
+                <a:solidFill>
+                  <a:srgbClr val="FFFF00"/>
+                </a:solidFill>
+              </a:rPr>
+              <a:t> MANAGEMENT</a:t>
+            </a:r>
+          </a:p>
+        </p:txBody>
+      </p:sp>
     </p:spTree>
     <p:extLst>
       <p:ext uri="{BB962C8B-B14F-4D97-AF65-F5344CB8AC3E}">
@@ -4230,6 +5097,54 @@
           </a:prstGeom>
         </p:spPr>
       </p:pic>
+      <p:sp>
+        <p:nvSpPr>
+          <p:cNvPr id="2" name="TextBox 1">
+            <a:extLst>
+              <a:ext uri="{FF2B5EF4-FFF2-40B4-BE49-F238E27FC236}">
+                <a16:creationId xmlns:a16="http://schemas.microsoft.com/office/drawing/2014/main" id="{8FFAFCFE-AE6C-60D5-FC14-12EFB7FF9C19}"/>
+              </a:ext>
+            </a:extLst>
+          </p:cNvPr>
+          <p:cNvSpPr txBox="1"/>
+          <p:nvPr/>
+        </p:nvSpPr>
+        <p:spPr>
+          <a:xfrm>
+            <a:off x="0" y="719190"/>
+            <a:ext cx="12192000" cy="369332"/>
+          </a:xfrm>
+          <a:prstGeom prst="rect">
+            <a:avLst/>
+          </a:prstGeom>
+          <a:noFill/>
+        </p:spPr>
+        <p:txBody>
+          <a:bodyPr wrap="square" rtlCol="0">
+            <a:spAutoFit/>
+          </a:bodyPr>
+          <a:lstStyle/>
+          <a:p>
+            <a:pPr algn="ctr"/>
+            <a:r>
+              <a:rPr lang="en-US" b="1" dirty="0">
+                <a:solidFill>
+                  <a:srgbClr val="FFFF00"/>
+                </a:solidFill>
+              </a:rPr>
+              <a:t>COMPASS </a:t>
+            </a:r>
+            <a:r>
+              <a:rPr lang="en-US" b="1" dirty="0">
+                <a:solidFill>
+                  <a:schemeClr val="bg1"/>
+                </a:solidFill>
+              </a:rPr>
+              <a:t>FORM &amp; WORKFLOW LIBRARY</a:t>
+            </a:r>
+          </a:p>
+        </p:txBody>
+      </p:sp>
     </p:spTree>
     <p:extLst>
       <p:ext uri="{BB962C8B-B14F-4D97-AF65-F5344CB8AC3E}">
@@ -4312,10 +5227,10 @@
       </p:sp>
       <p:pic>
         <p:nvPicPr>
-          <p:cNvPr id="5" name="Picture 4">
-            <a:extLst>
-              <a:ext uri="{FF2B5EF4-FFF2-40B4-BE49-F238E27FC236}">
-                <a16:creationId xmlns:a16="http://schemas.microsoft.com/office/drawing/2014/main" id="{44403891-F23A-3FDD-4ACE-7CF67A0BD267}"/>
+          <p:cNvPr id="6" name="Picture 5">
+            <a:extLst>
+              <a:ext uri="{FF2B5EF4-FFF2-40B4-BE49-F238E27FC236}">
+                <a16:creationId xmlns:a16="http://schemas.microsoft.com/office/drawing/2014/main" id="{C751CF2D-281E-AE25-77C4-829BA73EE4FB}"/>
               </a:ext>
             </a:extLst>
           </p:cNvPr>
@@ -4332,14 +5247,67 @@
         </p:blipFill>
         <p:spPr>
           <a:xfrm>
-            <a:off x="0" y="155575"/>
-            <a:ext cx="12192000" cy="6546850"/>
+            <a:off x="0" y="431800"/>
+            <a:ext cx="12192000" cy="5994400"/>
           </a:xfrm>
           <a:prstGeom prst="rect">
             <a:avLst/>
           </a:prstGeom>
         </p:spPr>
       </p:pic>
+      <p:sp>
+        <p:nvSpPr>
+          <p:cNvPr id="7" name="TextBox 6">
+            <a:extLst>
+              <a:ext uri="{FF2B5EF4-FFF2-40B4-BE49-F238E27FC236}">
+                <a16:creationId xmlns:a16="http://schemas.microsoft.com/office/drawing/2014/main" id="{D2C583F9-250F-C554-FFB0-6CBBB6451AA4}"/>
+              </a:ext>
+            </a:extLst>
+          </p:cNvPr>
+          <p:cNvSpPr txBox="1"/>
+          <p:nvPr/>
+        </p:nvSpPr>
+        <p:spPr>
+          <a:xfrm>
+            <a:off x="0" y="719190"/>
+            <a:ext cx="12192000" cy="369332"/>
+          </a:xfrm>
+          <a:prstGeom prst="rect">
+            <a:avLst/>
+          </a:prstGeom>
+          <a:noFill/>
+        </p:spPr>
+        <p:txBody>
+          <a:bodyPr wrap="square" rtlCol="0">
+            <a:spAutoFit/>
+          </a:bodyPr>
+          <a:lstStyle/>
+          <a:p>
+            <a:pPr algn="ctr"/>
+            <a:r>
+              <a:rPr lang="en-US" b="1">
+                <a:solidFill>
+                  <a:srgbClr val="FFFF00"/>
+                </a:solidFill>
+              </a:rPr>
+              <a:t>AEGIS </a:t>
+            </a:r>
+            <a:r>
+              <a:rPr lang="en-US" b="1">
+                <a:solidFill>
+                  <a:schemeClr val="bg1"/>
+                </a:solidFill>
+              </a:rPr>
+              <a:t>COMMAND CENTER</a:t>
+            </a:r>
+            <a:endParaRPr lang="en-US" b="1" dirty="0">
+              <a:solidFill>
+                <a:schemeClr val="bg1"/>
+              </a:solidFill>
+            </a:endParaRPr>
+          </a:p>
+        </p:txBody>
+      </p:sp>
     </p:spTree>
     <p:extLst>
       <p:ext uri="{BB962C8B-B14F-4D97-AF65-F5344CB8AC3E}">
@@ -4400,6 +5368,62 @@
           </a:prstGeom>
         </p:spPr>
       </p:pic>
+      <p:sp>
+        <p:nvSpPr>
+          <p:cNvPr id="2" name="TextBox 1">
+            <a:extLst>
+              <a:ext uri="{FF2B5EF4-FFF2-40B4-BE49-F238E27FC236}">
+                <a16:creationId xmlns:a16="http://schemas.microsoft.com/office/drawing/2014/main" id="{A163B0F2-19F9-B1A1-BB11-84D69C8ADF24}"/>
+              </a:ext>
+            </a:extLst>
+          </p:cNvPr>
+          <p:cNvSpPr txBox="1"/>
+          <p:nvPr/>
+        </p:nvSpPr>
+        <p:spPr>
+          <a:xfrm>
+            <a:off x="0" y="719190"/>
+            <a:ext cx="12192000" cy="369332"/>
+          </a:xfrm>
+          <a:prstGeom prst="rect">
+            <a:avLst/>
+          </a:prstGeom>
+          <a:noFill/>
+        </p:spPr>
+        <p:txBody>
+          <a:bodyPr wrap="square" rtlCol="0">
+            <a:spAutoFit/>
+          </a:bodyPr>
+          <a:lstStyle/>
+          <a:p>
+            <a:pPr algn="ctr"/>
+            <a:r>
+              <a:rPr lang="en-US" b="1" dirty="0">
+                <a:solidFill>
+                  <a:srgbClr val="FFFF00"/>
+                </a:solidFill>
+              </a:rPr>
+              <a:t>PROJECTHUD </a:t>
+            </a:r>
+            <a:r>
+              <a:rPr lang="en-US" b="1" dirty="0">
+                <a:solidFill>
+                  <a:schemeClr val="bg1"/>
+                </a:solidFill>
+              </a:rPr>
+              <a:t>USER</a:t>
+            </a:r>
+            <a:r>
+              <a:rPr lang="en-US" b="1" dirty="0">
+                <a:solidFill>
+                  <a:srgbClr val="FFFF00"/>
+                </a:solidFill>
+              </a:rPr>
+              <a:t> MANAGEMENT</a:t>
+            </a:r>
+          </a:p>
+        </p:txBody>
+      </p:sp>
     </p:spTree>
     <p:extLst>
       <p:ext uri="{BB962C8B-B14F-4D97-AF65-F5344CB8AC3E}">
@@ -4460,6 +5484,62 @@
           </a:prstGeom>
         </p:spPr>
       </p:pic>
+      <p:sp>
+        <p:nvSpPr>
+          <p:cNvPr id="2" name="TextBox 1">
+            <a:extLst>
+              <a:ext uri="{FF2B5EF4-FFF2-40B4-BE49-F238E27FC236}">
+                <a16:creationId xmlns:a16="http://schemas.microsoft.com/office/drawing/2014/main" id="{BC5981F0-A937-5E54-94CB-5CB3B5A8438A}"/>
+              </a:ext>
+            </a:extLst>
+          </p:cNvPr>
+          <p:cNvSpPr txBox="1"/>
+          <p:nvPr/>
+        </p:nvSpPr>
+        <p:spPr>
+          <a:xfrm>
+            <a:off x="0" y="719190"/>
+            <a:ext cx="12192000" cy="369332"/>
+          </a:xfrm>
+          <a:prstGeom prst="rect">
+            <a:avLst/>
+          </a:prstGeom>
+          <a:noFill/>
+        </p:spPr>
+        <p:txBody>
+          <a:bodyPr wrap="square" rtlCol="0">
+            <a:spAutoFit/>
+          </a:bodyPr>
+          <a:lstStyle/>
+          <a:p>
+            <a:pPr algn="ctr"/>
+            <a:r>
+              <a:rPr lang="en-US" b="1" dirty="0">
+                <a:solidFill>
+                  <a:srgbClr val="FFFF00"/>
+                </a:solidFill>
+              </a:rPr>
+              <a:t>PROJECTHUD </a:t>
+            </a:r>
+            <a:r>
+              <a:rPr lang="en-US" b="1" dirty="0">
+                <a:solidFill>
+                  <a:schemeClr val="bg1"/>
+                </a:solidFill>
+              </a:rPr>
+              <a:t>PIPELINE</a:t>
+            </a:r>
+            <a:r>
+              <a:rPr lang="en-US" b="1" dirty="0">
+                <a:solidFill>
+                  <a:srgbClr val="FFFF00"/>
+                </a:solidFill>
+              </a:rPr>
+              <a:t> MANAGEMENT</a:t>
+            </a:r>
+          </a:p>
+        </p:txBody>
+      </p:sp>
     </p:spTree>
     <p:extLst>
       <p:ext uri="{BB962C8B-B14F-4D97-AF65-F5344CB8AC3E}">
@@ -4520,6 +5600,54 @@
           </a:prstGeom>
         </p:spPr>
       </p:pic>
+      <p:sp>
+        <p:nvSpPr>
+          <p:cNvPr id="2" name="TextBox 1">
+            <a:extLst>
+              <a:ext uri="{FF2B5EF4-FFF2-40B4-BE49-F238E27FC236}">
+                <a16:creationId xmlns:a16="http://schemas.microsoft.com/office/drawing/2014/main" id="{81B69475-BD0F-AC17-91ED-2339A9771EB1}"/>
+              </a:ext>
+            </a:extLst>
+          </p:cNvPr>
+          <p:cNvSpPr txBox="1"/>
+          <p:nvPr/>
+        </p:nvSpPr>
+        <p:spPr>
+          <a:xfrm>
+            <a:off x="0" y="719190"/>
+            <a:ext cx="12192000" cy="369332"/>
+          </a:xfrm>
+          <a:prstGeom prst="rect">
+            <a:avLst/>
+          </a:prstGeom>
+          <a:noFill/>
+        </p:spPr>
+        <p:txBody>
+          <a:bodyPr wrap="square" rtlCol="0">
+            <a:spAutoFit/>
+          </a:bodyPr>
+          <a:lstStyle/>
+          <a:p>
+            <a:pPr algn="ctr"/>
+            <a:r>
+              <a:rPr lang="en-US" b="1" dirty="0">
+                <a:solidFill>
+                  <a:srgbClr val="FFFF00"/>
+                </a:solidFill>
+              </a:rPr>
+              <a:t>PROJECTHUD </a:t>
+            </a:r>
+            <a:r>
+              <a:rPr lang="en-US" b="1" dirty="0">
+                <a:solidFill>
+                  <a:schemeClr val="bg1"/>
+                </a:solidFill>
+              </a:rPr>
+              <a:t>MEETING MINUTES</a:t>
+            </a:r>
+          </a:p>
+        </p:txBody>
+      </p:sp>
     </p:spTree>
     <p:extLst>
       <p:ext uri="{BB962C8B-B14F-4D97-AF65-F5344CB8AC3E}">
@@ -4580,6 +5708,62 @@
           </a:prstGeom>
         </p:spPr>
       </p:pic>
+      <p:sp>
+        <p:nvSpPr>
+          <p:cNvPr id="2" name="TextBox 1">
+            <a:extLst>
+              <a:ext uri="{FF2B5EF4-FFF2-40B4-BE49-F238E27FC236}">
+                <a16:creationId xmlns:a16="http://schemas.microsoft.com/office/drawing/2014/main" id="{70037263-54B8-CE12-3303-9E0251ABA412}"/>
+              </a:ext>
+            </a:extLst>
+          </p:cNvPr>
+          <p:cNvSpPr txBox="1"/>
+          <p:nvPr/>
+        </p:nvSpPr>
+        <p:spPr>
+          <a:xfrm>
+            <a:off x="0" y="719190"/>
+            <a:ext cx="12192000" cy="369332"/>
+          </a:xfrm>
+          <a:prstGeom prst="rect">
+            <a:avLst/>
+          </a:prstGeom>
+          <a:noFill/>
+        </p:spPr>
+        <p:txBody>
+          <a:bodyPr wrap="square" rtlCol="0">
+            <a:spAutoFit/>
+          </a:bodyPr>
+          <a:lstStyle/>
+          <a:p>
+            <a:pPr algn="ctr"/>
+            <a:r>
+              <a:rPr lang="en-US" b="1" dirty="0">
+                <a:solidFill>
+                  <a:srgbClr val="FFFF00"/>
+                </a:solidFill>
+              </a:rPr>
+              <a:t>PROJECTHUD </a:t>
+            </a:r>
+            <a:r>
+              <a:rPr lang="en-US" b="1" dirty="0">
+                <a:solidFill>
+                  <a:schemeClr val="bg1"/>
+                </a:solidFill>
+              </a:rPr>
+              <a:t>PROPOSAL</a:t>
+            </a:r>
+            <a:r>
+              <a:rPr lang="en-US" b="1" dirty="0">
+                <a:solidFill>
+                  <a:srgbClr val="FFFF00"/>
+                </a:solidFill>
+              </a:rPr>
+              <a:t> MANAGEMENT</a:t>
+            </a:r>
+          </a:p>
+        </p:txBody>
+      </p:sp>
     </p:spTree>
     <p:extLst>
       <p:ext uri="{BB962C8B-B14F-4D97-AF65-F5344CB8AC3E}">
@@ -4640,6 +5824,54 @@
           </a:prstGeom>
         </p:spPr>
       </p:pic>
+      <p:sp>
+        <p:nvSpPr>
+          <p:cNvPr id="2" name="TextBox 1">
+            <a:extLst>
+              <a:ext uri="{FF2B5EF4-FFF2-40B4-BE49-F238E27FC236}">
+                <a16:creationId xmlns:a16="http://schemas.microsoft.com/office/drawing/2014/main" id="{5B260834-C155-5894-3C4A-81E1F0EC27DD}"/>
+              </a:ext>
+            </a:extLst>
+          </p:cNvPr>
+          <p:cNvSpPr txBox="1"/>
+          <p:nvPr/>
+        </p:nvSpPr>
+        <p:spPr>
+          <a:xfrm>
+            <a:off x="0" y="719190"/>
+            <a:ext cx="12192000" cy="369332"/>
+          </a:xfrm>
+          <a:prstGeom prst="rect">
+            <a:avLst/>
+          </a:prstGeom>
+          <a:noFill/>
+        </p:spPr>
+        <p:txBody>
+          <a:bodyPr wrap="square" rtlCol="0">
+            <a:spAutoFit/>
+          </a:bodyPr>
+          <a:lstStyle/>
+          <a:p>
+            <a:pPr algn="ctr"/>
+            <a:r>
+              <a:rPr lang="en-US" b="1" dirty="0">
+                <a:solidFill>
+                  <a:srgbClr val="FFFF00"/>
+                </a:solidFill>
+              </a:rPr>
+              <a:t>CADENCE </a:t>
+            </a:r>
+            <a:r>
+              <a:rPr lang="en-US" b="1" dirty="0">
+                <a:solidFill>
+                  <a:schemeClr val="bg1"/>
+                </a:solidFill>
+              </a:rPr>
+              <a:t>DASHBOARD</a:t>
+            </a:r>
+          </a:p>
+        </p:txBody>
+      </p:sp>
     </p:spTree>
     <p:extLst>
       <p:ext uri="{BB962C8B-B14F-4D97-AF65-F5344CB8AC3E}">
@@ -4700,6 +5932,54 @@
           </a:prstGeom>
         </p:spPr>
       </p:pic>
+      <p:sp>
+        <p:nvSpPr>
+          <p:cNvPr id="2" name="TextBox 1">
+            <a:extLst>
+              <a:ext uri="{FF2B5EF4-FFF2-40B4-BE49-F238E27FC236}">
+                <a16:creationId xmlns:a16="http://schemas.microsoft.com/office/drawing/2014/main" id="{75D90D01-8709-2FF6-0F53-2E267457BD08}"/>
+              </a:ext>
+            </a:extLst>
+          </p:cNvPr>
+          <p:cNvSpPr txBox="1"/>
+          <p:nvPr/>
+        </p:nvSpPr>
+        <p:spPr>
+          <a:xfrm>
+            <a:off x="0" y="719190"/>
+            <a:ext cx="12192000" cy="369332"/>
+          </a:xfrm>
+          <a:prstGeom prst="rect">
+            <a:avLst/>
+          </a:prstGeom>
+          <a:noFill/>
+        </p:spPr>
+        <p:txBody>
+          <a:bodyPr wrap="square" rtlCol="0">
+            <a:spAutoFit/>
+          </a:bodyPr>
+          <a:lstStyle/>
+          <a:p>
+            <a:pPr algn="ctr"/>
+            <a:r>
+              <a:rPr lang="en-US" b="1" dirty="0">
+                <a:solidFill>
+                  <a:srgbClr val="FFFF00"/>
+                </a:solidFill>
+              </a:rPr>
+              <a:t>CADENCE </a:t>
+            </a:r>
+            <a:r>
+              <a:rPr lang="en-US" b="1" dirty="0">
+                <a:solidFill>
+                  <a:schemeClr val="bg1"/>
+                </a:solidFill>
+              </a:rPr>
+              <a:t>WORKFLOW MANAGEMENT</a:t>
+            </a:r>
+          </a:p>
+        </p:txBody>
+      </p:sp>
     </p:spTree>
     <p:extLst>
       <p:ext uri="{BB962C8B-B14F-4D97-AF65-F5344CB8AC3E}">
@@ -4760,6 +6040,54 @@
           </a:prstGeom>
         </p:spPr>
       </p:pic>
+      <p:sp>
+        <p:nvSpPr>
+          <p:cNvPr id="2" name="TextBox 1">
+            <a:extLst>
+              <a:ext uri="{FF2B5EF4-FFF2-40B4-BE49-F238E27FC236}">
+                <a16:creationId xmlns:a16="http://schemas.microsoft.com/office/drawing/2014/main" id="{A2AC526B-CE70-7B58-8C8F-3528B9A2AC05}"/>
+              </a:ext>
+            </a:extLst>
+          </p:cNvPr>
+          <p:cNvSpPr txBox="1"/>
+          <p:nvPr/>
+        </p:nvSpPr>
+        <p:spPr>
+          <a:xfrm>
+            <a:off x="0" y="719190"/>
+            <a:ext cx="12192000" cy="369332"/>
+          </a:xfrm>
+          <a:prstGeom prst="rect">
+            <a:avLst/>
+          </a:prstGeom>
+          <a:noFill/>
+        </p:spPr>
+        <p:txBody>
+          <a:bodyPr wrap="square" rtlCol="0">
+            <a:spAutoFit/>
+          </a:bodyPr>
+          <a:lstStyle/>
+          <a:p>
+            <a:pPr algn="ctr"/>
+            <a:r>
+              <a:rPr lang="en-US" b="1" dirty="0">
+                <a:solidFill>
+                  <a:srgbClr val="FFFF00"/>
+                </a:solidFill>
+              </a:rPr>
+              <a:t>CADENCE </a:t>
+            </a:r>
+            <a:r>
+              <a:rPr lang="en-US" b="1" dirty="0">
+                <a:solidFill>
+                  <a:schemeClr val="bg1"/>
+                </a:solidFill>
+              </a:rPr>
+              <a:t>FORM MANAGEMENT</a:t>
+            </a:r>
+          </a:p>
+        </p:txBody>
+      </p:sp>
     </p:spTree>
     <p:extLst>
       <p:ext uri="{BB962C8B-B14F-4D97-AF65-F5344CB8AC3E}">
